--- a/figs.pptx
+++ b/figs.pptx
@@ -6,9 +6,11 @@
   </p:sldMasterIdLst>
   <p:sldIdLst>
     <p:sldId id="256" r:id="rId2"/>
-    <p:sldId id="277" r:id="rId3"/>
-    <p:sldId id="279" r:id="rId4"/>
-    <p:sldId id="278" r:id="rId5"/>
+    <p:sldId id="281" r:id="rId3"/>
+    <p:sldId id="280" r:id="rId4"/>
+    <p:sldId id="277" r:id="rId5"/>
+    <p:sldId id="279" r:id="rId6"/>
+    <p:sldId id="278" r:id="rId7"/>
   </p:sldIdLst>
   <p:sldSz cx="12192000" cy="6858000"/>
   <p:notesSz cx="6858000" cy="9144000"/>
@@ -3324,6 +3326,107 @@
           <a:chExt cx="0" cy="0"/>
         </a:xfrm>
       </p:grpSpPr>
+      <p:pic>
+        <p:nvPicPr>
+          <p:cNvPr id="5" name="Picture 4">
+            <a:extLst>
+              <a:ext uri="{FF2B5EF4-FFF2-40B4-BE49-F238E27FC236}">
+                <a16:creationId xmlns:a16="http://schemas.microsoft.com/office/drawing/2014/main" id="{EB71FB3E-5114-C5B1-7B27-A3EEFE659D54}"/>
+              </a:ext>
+            </a:extLst>
+          </p:cNvPr>
+          <p:cNvPicPr>
+            <a:picLocks noChangeAspect="1"/>
+          </p:cNvPicPr>
+          <p:nvPr/>
+        </p:nvPicPr>
+        <p:blipFill>
+          <a:blip r:embed="rId2"/>
+          <a:stretch>
+            <a:fillRect/>
+          </a:stretch>
+        </p:blipFill>
+        <p:spPr>
+          <a:xfrm>
+            <a:off x="2404635" y="1305891"/>
+            <a:ext cx="7207198" cy="3365726"/>
+          </a:xfrm>
+          <a:prstGeom prst="rect">
+            <a:avLst/>
+          </a:prstGeom>
+        </p:spPr>
+      </p:pic>
+      <p:pic>
+        <p:nvPicPr>
+          <p:cNvPr id="4" name="Picture 3">
+            <a:extLst>
+              <a:ext uri="{FF2B5EF4-FFF2-40B4-BE49-F238E27FC236}">
+                <a16:creationId xmlns:a16="http://schemas.microsoft.com/office/drawing/2014/main" id="{0BE42D28-6DB5-D2DF-64E8-68B055069847}"/>
+              </a:ext>
+            </a:extLst>
+          </p:cNvPr>
+          <p:cNvPicPr>
+            <a:picLocks noChangeAspect="1"/>
+          </p:cNvPicPr>
+          <p:nvPr/>
+        </p:nvPicPr>
+        <p:blipFill>
+          <a:blip r:embed="rId3"/>
+          <a:srcRect t="17931" b="6454"/>
+          <a:stretch>
+            <a:fillRect/>
+          </a:stretch>
+        </p:blipFill>
+        <p:spPr>
+          <a:xfrm>
+            <a:off x="3288440" y="2833576"/>
+            <a:ext cx="5439587" cy="1190847"/>
+          </a:xfrm>
+          <a:prstGeom prst="rect">
+            <a:avLst/>
+          </a:prstGeom>
+          <a:ln>
+            <a:noFill/>
+          </a:ln>
+          <a:effectLst>
+            <a:outerShdw blurRad="50800" dist="38100" dir="2700000" algn="tl" rotWithShape="0">
+              <a:prstClr val="black">
+                <a:alpha val="40000"/>
+              </a:prstClr>
+            </a:outerShdw>
+          </a:effectLst>
+        </p:spPr>
+      </p:pic>
+      <p:pic>
+        <p:nvPicPr>
+          <p:cNvPr id="6" name="Picture 5">
+            <a:extLst>
+              <a:ext uri="{FF2B5EF4-FFF2-40B4-BE49-F238E27FC236}">
+                <a16:creationId xmlns:a16="http://schemas.microsoft.com/office/drawing/2014/main" id="{73A20BF0-6120-5C01-F7DE-C333C779AE04}"/>
+              </a:ext>
+            </a:extLst>
+          </p:cNvPr>
+          <p:cNvPicPr>
+            <a:picLocks noChangeAspect="1"/>
+          </p:cNvPicPr>
+          <p:nvPr/>
+        </p:nvPicPr>
+        <p:blipFill>
+          <a:blip r:embed="rId4"/>
+          <a:stretch>
+            <a:fillRect/>
+          </a:stretch>
+        </p:blipFill>
+        <p:spPr>
+          <a:xfrm>
+            <a:off x="3288440" y="1642729"/>
+            <a:ext cx="2284975" cy="1190847"/>
+          </a:xfrm>
+          <a:prstGeom prst="rect">
+            <a:avLst/>
+          </a:prstGeom>
+        </p:spPr>
+      </p:pic>
     </p:spTree>
     <p:extLst>
       <p:ext uri="{BB962C8B-B14F-4D97-AF65-F5344CB8AC3E}">
@@ -3338,6 +3441,291 @@
 </file>
 
 <file path=ppt/slides/slide2.xml><?xml version="1.0" encoding="utf-8"?>
+<p:sld xmlns:a="http://schemas.openxmlformats.org/drawingml/2006/main" xmlns:r="http://schemas.openxmlformats.org/officeDocument/2006/relationships" xmlns:p="http://schemas.openxmlformats.org/presentationml/2006/main">
+  <p:cSld>
+    <p:spTree>
+      <p:nvGrpSpPr>
+        <p:cNvPr id="1" name="">
+          <a:extLst>
+            <a:ext uri="{FF2B5EF4-FFF2-40B4-BE49-F238E27FC236}">
+              <a16:creationId xmlns:a16="http://schemas.microsoft.com/office/drawing/2014/main" id="{49FCFBF4-0DD5-FECD-AE6E-788D82C0E211}"/>
+            </a:ext>
+          </a:extLst>
+        </p:cNvPr>
+        <p:cNvGrpSpPr/>
+        <p:nvPr/>
+      </p:nvGrpSpPr>
+      <p:grpSpPr>
+        <a:xfrm>
+          <a:off x="0" y="0"/>
+          <a:ext cx="0" cy="0"/>
+          <a:chOff x="0" y="0"/>
+          <a:chExt cx="0" cy="0"/>
+        </a:xfrm>
+      </p:grpSpPr>
+      <p:pic>
+        <p:nvPicPr>
+          <p:cNvPr id="5" name="Picture 4">
+            <a:extLst>
+              <a:ext uri="{FF2B5EF4-FFF2-40B4-BE49-F238E27FC236}">
+                <a16:creationId xmlns:a16="http://schemas.microsoft.com/office/drawing/2014/main" id="{857B642C-FEBC-3FC5-2227-0674F36AB90E}"/>
+              </a:ext>
+            </a:extLst>
+          </p:cNvPr>
+          <p:cNvPicPr>
+            <a:picLocks noChangeAspect="1"/>
+          </p:cNvPicPr>
+          <p:nvPr/>
+        </p:nvPicPr>
+        <p:blipFill>
+          <a:blip r:embed="rId2"/>
+          <a:stretch>
+            <a:fillRect/>
+          </a:stretch>
+        </p:blipFill>
+        <p:spPr>
+          <a:xfrm>
+            <a:off x="4620388" y="1457936"/>
+            <a:ext cx="3029069" cy="1414560"/>
+          </a:xfrm>
+          <a:prstGeom prst="rect">
+            <a:avLst/>
+          </a:prstGeom>
+        </p:spPr>
+      </p:pic>
+      <p:pic>
+        <p:nvPicPr>
+          <p:cNvPr id="4" name="Picture 3">
+            <a:extLst>
+              <a:ext uri="{FF2B5EF4-FFF2-40B4-BE49-F238E27FC236}">
+                <a16:creationId xmlns:a16="http://schemas.microsoft.com/office/drawing/2014/main" id="{1DF25723-7F9C-58E2-921A-0B5E89419A55}"/>
+              </a:ext>
+            </a:extLst>
+          </p:cNvPr>
+          <p:cNvPicPr>
+            <a:picLocks noChangeAspect="1"/>
+          </p:cNvPicPr>
+          <p:nvPr/>
+        </p:nvPicPr>
+        <p:blipFill>
+          <a:blip r:embed="rId3"/>
+          <a:srcRect t="17931" b="6454"/>
+          <a:stretch>
+            <a:fillRect/>
+          </a:stretch>
+        </p:blipFill>
+        <p:spPr>
+          <a:xfrm>
+            <a:off x="1535156" y="2961041"/>
+            <a:ext cx="6166921" cy="1350077"/>
+          </a:xfrm>
+          <a:prstGeom prst="rect">
+            <a:avLst/>
+          </a:prstGeom>
+          <a:ln>
+            <a:noFill/>
+          </a:ln>
+          <a:effectLst/>
+        </p:spPr>
+      </p:pic>
+      <p:pic>
+        <p:nvPicPr>
+          <p:cNvPr id="2" name="Picture 1">
+            <a:extLst>
+              <a:ext uri="{FF2B5EF4-FFF2-40B4-BE49-F238E27FC236}">
+                <a16:creationId xmlns:a16="http://schemas.microsoft.com/office/drawing/2014/main" id="{79A11379-99EC-754D-ADD3-1F192E1F899A}"/>
+              </a:ext>
+            </a:extLst>
+          </p:cNvPr>
+          <p:cNvPicPr>
+            <a:picLocks noChangeAspect="1"/>
+          </p:cNvPicPr>
+          <p:nvPr/>
+        </p:nvPicPr>
+        <p:blipFill>
+          <a:blip r:embed="rId4"/>
+          <a:stretch>
+            <a:fillRect/>
+          </a:stretch>
+        </p:blipFill>
+        <p:spPr>
+          <a:xfrm>
+            <a:off x="1535156" y="1457936"/>
+            <a:ext cx="2954768" cy="1407731"/>
+          </a:xfrm>
+          <a:prstGeom prst="rect">
+            <a:avLst/>
+          </a:prstGeom>
+        </p:spPr>
+      </p:pic>
+    </p:spTree>
+    <p:extLst>
+      <p:ext uri="{BB962C8B-B14F-4D97-AF65-F5344CB8AC3E}">
+        <p14:creationId xmlns:p14="http://schemas.microsoft.com/office/powerpoint/2010/main" val="3698093277"/>
+      </p:ext>
+    </p:extLst>
+  </p:cSld>
+  <p:clrMapOvr>
+    <a:masterClrMapping/>
+  </p:clrMapOvr>
+</p:sld>
+</file>
+
+<file path=ppt/slides/slide3.xml><?xml version="1.0" encoding="utf-8"?>
+<p:sld xmlns:a="http://schemas.openxmlformats.org/drawingml/2006/main" xmlns:r="http://schemas.openxmlformats.org/officeDocument/2006/relationships" xmlns:p="http://schemas.openxmlformats.org/presentationml/2006/main">
+  <p:cSld>
+    <p:spTree>
+      <p:nvGrpSpPr>
+        <p:cNvPr id="1" name=""/>
+        <p:cNvGrpSpPr/>
+        <p:nvPr/>
+      </p:nvGrpSpPr>
+      <p:grpSpPr>
+        <a:xfrm>
+          <a:off x="0" y="0"/>
+          <a:ext cx="0" cy="0"/>
+          <a:chOff x="0" y="0"/>
+          <a:chExt cx="0" cy="0"/>
+        </a:xfrm>
+      </p:grpSpPr>
+      <mc:AlternateContent xmlns:mc="http://schemas.openxmlformats.org/markup-compatibility/2006">
+        <mc:Choice xmlns:am3d="http://schemas.microsoft.com/office/drawing/2017/model3d" Requires="am3d">
+          <p:graphicFrame>
+            <p:nvGraphicFramePr>
+              <p:cNvPr id="5" name="3D Model 4">
+                <a:extLst>
+                  <a:ext uri="{FF2B5EF4-FFF2-40B4-BE49-F238E27FC236}">
+                    <a16:creationId xmlns:a16="http://schemas.microsoft.com/office/drawing/2014/main" id="{D49D4111-A34C-4E3B-7B54-1BB1964BC69C}"/>
+                  </a:ext>
+                </a:extLst>
+              </p:cNvPr>
+              <p:cNvGraphicFramePr>
+                <a:graphicFrameLocks noChangeAspect="1"/>
+              </p:cNvGraphicFramePr>
+              <p:nvPr>
+                <p:extLst>
+                  <p:ext uri="{D42A27DB-BD31-4B8C-83A1-F6EECF244321}">
+                    <p14:modId xmlns:p14="http://schemas.microsoft.com/office/powerpoint/2010/main" val="945494531"/>
+                  </p:ext>
+                </p:extLst>
+              </p:nvPr>
+            </p:nvGraphicFramePr>
+            <p:xfrm>
+              <a:off x="3438918" y="2076985"/>
+              <a:ext cx="5314163" cy="2470108"/>
+            </p:xfrm>
+            <a:graphic>
+              <a:graphicData uri="http://schemas.microsoft.com/office/drawing/2017/model3d">
+                <am3d:model3d r:embed="rId2">
+                  <am3d:spPr>
+                    <a:xfrm>
+                      <a:off x="0" y="0"/>
+                      <a:ext cx="5314163" cy="2470108"/>
+                    </a:xfrm>
+                    <a:prstGeom prst="rect">
+                      <a:avLst/>
+                    </a:prstGeom>
+                  </am3d:spPr>
+                  <am3d:camera>
+                    <am3d:pos x="0" y="0" z="68316588"/>
+                    <am3d:up dx="0" dy="36000000" dz="0"/>
+                    <am3d:lookAt x="0" y="0" z="0"/>
+                    <am3d:perspective fov="2700000"/>
+                  </am3d:camera>
+                  <am3d:trans>
+                    <am3d:meterPerModelUnit n="4973" d="1000000"/>
+                    <am3d:preTrans dx="-17904247" dy="3518650" dz="3485096"/>
+                    <am3d:scale>
+                      <am3d:sx n="1000000" d="1000000"/>
+                      <am3d:sy n="1000000" d="1000000"/>
+                      <am3d:sz n="1000000" d="1000000"/>
+                    </am3d:scale>
+                    <am3d:rot ax="2373557" ay="-3794150" az="-2184677"/>
+                    <am3d:postTrans dx="0" dy="0" dz="0"/>
+                  </am3d:trans>
+                  <am3d:raster rName="Office3DRenderer" rVer="16.0.8326">
+                    <am3d:blip r:embed="rId3"/>
+                  </am3d:raster>
+                  <am3d:objViewport viewportSz="5418664"/>
+                  <am3d:ambientLight>
+                    <am3d:clr>
+                      <a:scrgbClr r="50000" g="50000" b="50000"/>
+                    </am3d:clr>
+                    <am3d:illuminance n="500000" d="1000000"/>
+                  </am3d:ambientLight>
+                  <am3d:ptLight rad="0">
+                    <am3d:clr>
+                      <a:scrgbClr r="100000" g="75000" b="50000"/>
+                    </am3d:clr>
+                    <am3d:intensity n="9765625" d="1000000"/>
+                    <am3d:pos x="21959998" y="70920001" z="16344003"/>
+                  </am3d:ptLight>
+                  <am3d:ptLight rad="0">
+                    <am3d:clr>
+                      <a:scrgbClr r="40000" g="60000" b="95000"/>
+                    </am3d:clr>
+                    <am3d:intensity n="12250000" d="1000000"/>
+                    <am3d:pos x="-37964106" y="51130435" z="57631972"/>
+                  </am3d:ptLight>
+                  <am3d:ptLight rad="0">
+                    <am3d:clr>
+                      <a:scrgbClr r="86837" g="72700" b="100000"/>
+                    </am3d:clr>
+                    <am3d:intensity n="3125000" d="1000000"/>
+                    <am3d:pos x="-37739122" y="58056624" z="-34769649"/>
+                  </am3d:ptLight>
+                </am3d:model3d>
+              </a:graphicData>
+            </a:graphic>
+          </p:graphicFrame>
+        </mc:Choice>
+        <mc:Fallback>
+          <p:pic>
+            <p:nvPicPr>
+              <p:cNvPr id="5" name="3D Model 4">
+                <a:extLst>
+                  <a:ext uri="{FF2B5EF4-FFF2-40B4-BE49-F238E27FC236}">
+                    <a16:creationId xmlns:a16="http://schemas.microsoft.com/office/drawing/2014/main" id="{D49D4111-A34C-4E3B-7B54-1BB1964BC69C}"/>
+                  </a:ext>
+                </a:extLst>
+              </p:cNvPr>
+              <p:cNvPicPr>
+                <a:picLocks noGrp="1" noRot="1" noChangeAspect="1" noMove="1" noResize="1" noEditPoints="1" noAdjustHandles="1" noChangeArrowheads="1" noChangeShapeType="1" noCrop="1"/>
+              </p:cNvPicPr>
+              <p:nvPr/>
+            </p:nvPicPr>
+            <p:blipFill>
+              <a:blip r:embed="rId3"/>
+              <a:stretch>
+                <a:fillRect/>
+              </a:stretch>
+            </p:blipFill>
+            <p:spPr>
+              <a:xfrm>
+                <a:off x="3438918" y="2076985"/>
+                <a:ext cx="5314163" cy="2470108"/>
+              </a:xfrm>
+              <a:prstGeom prst="rect">
+                <a:avLst/>
+              </a:prstGeom>
+            </p:spPr>
+          </p:pic>
+        </mc:Fallback>
+      </mc:AlternateContent>
+    </p:spTree>
+    <p:extLst>
+      <p:ext uri="{BB962C8B-B14F-4D97-AF65-F5344CB8AC3E}">
+        <p14:creationId xmlns:p14="http://schemas.microsoft.com/office/powerpoint/2010/main" val="12497828"/>
+      </p:ext>
+    </p:extLst>
+  </p:cSld>
+  <p:clrMapOvr>
+    <a:masterClrMapping/>
+  </p:clrMapOvr>
+</p:sld>
+</file>
+
+<file path=ppt/slides/slide4.xml><?xml version="1.0" encoding="utf-8"?>
 <p:sld xmlns:a="http://schemas.openxmlformats.org/drawingml/2006/main" xmlns:r="http://schemas.openxmlformats.org/officeDocument/2006/relationships" xmlns:p="http://schemas.openxmlformats.org/presentationml/2006/main">
   <p:cSld>
     <p:spTree>
@@ -3645,7 +4033,7 @@
 </p:sld>
 </file>
 
-<file path=ppt/slides/slide3.xml><?xml version="1.0" encoding="utf-8"?>
+<file path=ppt/slides/slide5.xml><?xml version="1.0" encoding="utf-8"?>
 <p:sld xmlns:a="http://schemas.openxmlformats.org/drawingml/2006/main" xmlns:r="http://schemas.openxmlformats.org/officeDocument/2006/relationships" xmlns:p="http://schemas.openxmlformats.org/presentationml/2006/main">
   <p:cSld>
     <p:spTree>
@@ -4073,7 +4461,7 @@
 </p:sld>
 </file>
 
-<file path=ppt/slides/slide4.xml><?xml version="1.0" encoding="utf-8"?>
+<file path=ppt/slides/slide6.xml><?xml version="1.0" encoding="utf-8"?>
 <p:sld xmlns:a="http://schemas.openxmlformats.org/drawingml/2006/main" xmlns:r="http://schemas.openxmlformats.org/officeDocument/2006/relationships" xmlns:p="http://schemas.openxmlformats.org/presentationml/2006/main">
   <p:cSld>
     <p:spTree>

--- a/figs.pptx
+++ b/figs.pptx
@@ -6,11 +6,12 @@
   </p:sldMasterIdLst>
   <p:sldIdLst>
     <p:sldId id="256" r:id="rId2"/>
-    <p:sldId id="281" r:id="rId3"/>
-    <p:sldId id="280" r:id="rId4"/>
-    <p:sldId id="277" r:id="rId5"/>
-    <p:sldId id="279" r:id="rId6"/>
-    <p:sldId id="278" r:id="rId7"/>
+    <p:sldId id="282" r:id="rId3"/>
+    <p:sldId id="281" r:id="rId4"/>
+    <p:sldId id="280" r:id="rId5"/>
+    <p:sldId id="277" r:id="rId6"/>
+    <p:sldId id="279" r:id="rId7"/>
+    <p:sldId id="278" r:id="rId8"/>
   </p:sldIdLst>
   <p:sldSz cx="12192000" cy="6858000"/>
   <p:notesSz cx="6858000" cy="9144000"/>
@@ -109,6 +110,11 @@
       </a:defRPr>
     </a:lvl9pPr>
   </p:defaultTextStyle>
+  <p:extLst>
+    <p:ext uri="{EFAFB233-063F-42B5-8137-9DF3F51BA10A}">
+      <p15:sldGuideLst xmlns:p15="http://schemas.microsoft.com/office/powerpoint/2012/main"/>
+    </p:ext>
+  </p:extLst>
 </p:presentation>
 </file>
 
@@ -259,7 +265,7 @@
           <a:p>
             <a:fld id="{F2524918-5D8A-A846-BB6B-C52C88DEC054}" type="datetimeFigureOut">
               <a:rPr lang="en-US" smtClean="0"/>
-              <a:t>4/22/26</a:t>
+              <a:t>7/9/26</a:t>
             </a:fld>
             <a:endParaRPr lang="en-US"/>
           </a:p>
@@ -457,7 +463,7 @@
           <a:p>
             <a:fld id="{F2524918-5D8A-A846-BB6B-C52C88DEC054}" type="datetimeFigureOut">
               <a:rPr lang="en-US" smtClean="0"/>
-              <a:t>4/22/26</a:t>
+              <a:t>7/9/26</a:t>
             </a:fld>
             <a:endParaRPr lang="en-US"/>
           </a:p>
@@ -665,7 +671,7 @@
           <a:p>
             <a:fld id="{F2524918-5D8A-A846-BB6B-C52C88DEC054}" type="datetimeFigureOut">
               <a:rPr lang="en-US" smtClean="0"/>
-              <a:t>4/22/26</a:t>
+              <a:t>7/9/26</a:t>
             </a:fld>
             <a:endParaRPr lang="en-US"/>
           </a:p>
@@ -863,7 +869,7 @@
           <a:p>
             <a:fld id="{F2524918-5D8A-A846-BB6B-C52C88DEC054}" type="datetimeFigureOut">
               <a:rPr lang="en-US" smtClean="0"/>
-              <a:t>4/22/26</a:t>
+              <a:t>7/9/26</a:t>
             </a:fld>
             <a:endParaRPr lang="en-US"/>
           </a:p>
@@ -1138,7 +1144,7 @@
           <a:p>
             <a:fld id="{F2524918-5D8A-A846-BB6B-C52C88DEC054}" type="datetimeFigureOut">
               <a:rPr lang="en-US" smtClean="0"/>
-              <a:t>4/22/26</a:t>
+              <a:t>7/9/26</a:t>
             </a:fld>
             <a:endParaRPr lang="en-US"/>
           </a:p>
@@ -1403,7 +1409,7 @@
           <a:p>
             <a:fld id="{F2524918-5D8A-A846-BB6B-C52C88DEC054}" type="datetimeFigureOut">
               <a:rPr lang="en-US" smtClean="0"/>
-              <a:t>4/22/26</a:t>
+              <a:t>7/9/26</a:t>
             </a:fld>
             <a:endParaRPr lang="en-US"/>
           </a:p>
@@ -1815,7 +1821,7 @@
           <a:p>
             <a:fld id="{F2524918-5D8A-A846-BB6B-C52C88DEC054}" type="datetimeFigureOut">
               <a:rPr lang="en-US" smtClean="0"/>
-              <a:t>4/22/26</a:t>
+              <a:t>7/9/26</a:t>
             </a:fld>
             <a:endParaRPr lang="en-US"/>
           </a:p>
@@ -1956,7 +1962,7 @@
           <a:p>
             <a:fld id="{F2524918-5D8A-A846-BB6B-C52C88DEC054}" type="datetimeFigureOut">
               <a:rPr lang="en-US" smtClean="0"/>
-              <a:t>4/22/26</a:t>
+              <a:t>7/9/26</a:t>
             </a:fld>
             <a:endParaRPr lang="en-US"/>
           </a:p>
@@ -2069,7 +2075,7 @@
           <a:p>
             <a:fld id="{F2524918-5D8A-A846-BB6B-C52C88DEC054}" type="datetimeFigureOut">
               <a:rPr lang="en-US" smtClean="0"/>
-              <a:t>4/22/26</a:t>
+              <a:t>7/9/26</a:t>
             </a:fld>
             <a:endParaRPr lang="en-US"/>
           </a:p>
@@ -2380,7 +2386,7 @@
           <a:p>
             <a:fld id="{F2524918-5D8A-A846-BB6B-C52C88DEC054}" type="datetimeFigureOut">
               <a:rPr lang="en-US" smtClean="0"/>
-              <a:t>4/22/26</a:t>
+              <a:t>7/9/26</a:t>
             </a:fld>
             <a:endParaRPr lang="en-US"/>
           </a:p>
@@ -2668,7 +2674,7 @@
           <a:p>
             <a:fld id="{F2524918-5D8A-A846-BB6B-C52C88DEC054}" type="datetimeFigureOut">
               <a:rPr lang="en-US" smtClean="0"/>
-              <a:t>4/22/26</a:t>
+              <a:t>7/9/26</a:t>
             </a:fld>
             <a:endParaRPr lang="en-US"/>
           </a:p>
@@ -2909,7 +2915,7 @@
           <a:p>
             <a:fld id="{F2524918-5D8A-A846-BB6B-C52C88DEC054}" type="datetimeFigureOut">
               <a:rPr lang="en-US" smtClean="0"/>
-              <a:t>4/22/26</a:t>
+              <a:t>7/9/26</a:t>
             </a:fld>
             <a:endParaRPr lang="en-US"/>
           </a:p>
@@ -3445,6 +3451,1071 @@
   <p:cSld>
     <p:spTree>
       <p:nvGrpSpPr>
+        <p:cNvPr id="1" name=""/>
+        <p:cNvGrpSpPr/>
+        <p:nvPr/>
+      </p:nvGrpSpPr>
+      <p:grpSpPr>
+        <a:xfrm>
+          <a:off x="0" y="0"/>
+          <a:ext cx="0" cy="0"/>
+          <a:chOff x="0" y="0"/>
+          <a:chExt cx="0" cy="0"/>
+        </a:xfrm>
+      </p:grpSpPr>
+      <p:sp>
+        <p:nvSpPr>
+          <p:cNvPr id="25" name="Oval 24">
+            <a:extLst>
+              <a:ext uri="{FF2B5EF4-FFF2-40B4-BE49-F238E27FC236}">
+                <a16:creationId xmlns:a16="http://schemas.microsoft.com/office/drawing/2014/main" id="{FD46FA31-26D0-33DE-6D73-063072DB9BBD}"/>
+              </a:ext>
+            </a:extLst>
+          </p:cNvPr>
+          <p:cNvSpPr/>
+          <p:nvPr/>
+        </p:nvSpPr>
+        <p:spPr>
+          <a:xfrm>
+            <a:off x="1036634" y="1514573"/>
+            <a:ext cx="3001453" cy="3001453"/>
+          </a:xfrm>
+          <a:prstGeom prst="ellipse">
+            <a:avLst/>
+          </a:prstGeom>
+          <a:gradFill flip="none" rotWithShape="1">
+            <a:gsLst>
+              <a:gs pos="0">
+                <a:schemeClr val="tx2">
+                  <a:lumMod val="25000"/>
+                  <a:lumOff val="75000"/>
+                </a:schemeClr>
+              </a:gs>
+              <a:gs pos="100000">
+                <a:schemeClr val="tx2">
+                  <a:alpha val="0"/>
+                  <a:lumMod val="0"/>
+                  <a:lumOff val="100000"/>
+                </a:schemeClr>
+              </a:gs>
+            </a:gsLst>
+            <a:path path="circle">
+              <a:fillToRect l="50000" t="50000" r="50000" b="50000"/>
+            </a:path>
+            <a:tileRect/>
+          </a:gradFill>
+          <a:ln>
+            <a:noFill/>
+          </a:ln>
+        </p:spPr>
+        <p:style>
+          <a:lnRef idx="2">
+            <a:schemeClr val="accent1">
+              <a:shade val="15000"/>
+            </a:schemeClr>
+          </a:lnRef>
+          <a:fillRef idx="1">
+            <a:schemeClr val="accent1"/>
+          </a:fillRef>
+          <a:effectRef idx="0">
+            <a:schemeClr val="accent1"/>
+          </a:effectRef>
+          <a:fontRef idx="minor">
+            <a:schemeClr val="lt1"/>
+          </a:fontRef>
+        </p:style>
+        <p:txBody>
+          <a:bodyPr rtlCol="0" anchor="ctr"/>
+          <a:lstStyle/>
+          <a:p>
+            <a:pPr algn="ctr"/>
+            <a:endParaRPr lang="en-US"/>
+          </a:p>
+        </p:txBody>
+      </p:sp>
+      <p:sp>
+        <p:nvSpPr>
+          <p:cNvPr id="2" name="Rectangle 1">
+            <a:extLst>
+              <a:ext uri="{FF2B5EF4-FFF2-40B4-BE49-F238E27FC236}">
+                <a16:creationId xmlns:a16="http://schemas.microsoft.com/office/drawing/2014/main" id="{5B006ED7-2D91-462A-F20F-9B96362100A5}"/>
+              </a:ext>
+            </a:extLst>
+          </p:cNvPr>
+          <p:cNvSpPr/>
+          <p:nvPr/>
+        </p:nvSpPr>
+        <p:spPr>
+          <a:xfrm>
+            <a:off x="210727" y="-354329"/>
+            <a:ext cx="11407806" cy="5715000"/>
+          </a:xfrm>
+          <a:prstGeom prst="rect">
+            <a:avLst/>
+          </a:prstGeom>
+          <a:gradFill flip="none" rotWithShape="1">
+            <a:gsLst>
+              <a:gs pos="0">
+                <a:schemeClr val="accent1">
+                  <a:tint val="44500"/>
+                  <a:satMod val="160000"/>
+                  <a:alpha val="29670"/>
+                </a:schemeClr>
+              </a:gs>
+              <a:gs pos="99000">
+                <a:schemeClr val="bg1">
+                  <a:lumMod val="95000"/>
+                  <a:alpha val="0"/>
+                </a:schemeClr>
+              </a:gs>
+            </a:gsLst>
+            <a:lin ang="13500000" scaled="1"/>
+            <a:tileRect/>
+          </a:gradFill>
+          <a:ln>
+            <a:noFill/>
+          </a:ln>
+        </p:spPr>
+        <p:style>
+          <a:lnRef idx="2">
+            <a:schemeClr val="accent1">
+              <a:shade val="15000"/>
+            </a:schemeClr>
+          </a:lnRef>
+          <a:fillRef idx="1">
+            <a:schemeClr val="accent1"/>
+          </a:fillRef>
+          <a:effectRef idx="0">
+            <a:schemeClr val="accent1"/>
+          </a:effectRef>
+          <a:fontRef idx="minor">
+            <a:schemeClr val="lt1"/>
+          </a:fontRef>
+        </p:style>
+        <p:txBody>
+          <a:bodyPr rtlCol="0" anchor="ctr"/>
+          <a:lstStyle/>
+          <a:p>
+            <a:pPr algn="ctr"/>
+            <a:endParaRPr lang="en-US"/>
+          </a:p>
+        </p:txBody>
+      </p:sp>
+      <p:sp>
+        <p:nvSpPr>
+          <p:cNvPr id="3" name="Rounded Rectangle 2">
+            <a:extLst>
+              <a:ext uri="{FF2B5EF4-FFF2-40B4-BE49-F238E27FC236}">
+                <a16:creationId xmlns:a16="http://schemas.microsoft.com/office/drawing/2014/main" id="{DD9A39A0-A760-BE17-854D-FB557AE42091}"/>
+              </a:ext>
+            </a:extLst>
+          </p:cNvPr>
+          <p:cNvSpPr/>
+          <p:nvPr/>
+        </p:nvSpPr>
+        <p:spPr>
+          <a:xfrm>
+            <a:off x="1896329" y="2091367"/>
+            <a:ext cx="1524000" cy="1512149"/>
+          </a:xfrm>
+          <a:prstGeom prst="roundRect">
+            <a:avLst/>
+          </a:prstGeom>
+          <a:solidFill>
+            <a:schemeClr val="bg1">
+              <a:lumMod val="95000"/>
+            </a:schemeClr>
+          </a:solidFill>
+          <a:ln>
+            <a:noFill/>
+          </a:ln>
+        </p:spPr>
+        <p:style>
+          <a:lnRef idx="2">
+            <a:schemeClr val="accent1">
+              <a:shade val="15000"/>
+            </a:schemeClr>
+          </a:lnRef>
+          <a:fillRef idx="1">
+            <a:schemeClr val="accent1"/>
+          </a:fillRef>
+          <a:effectRef idx="0">
+            <a:schemeClr val="accent1"/>
+          </a:effectRef>
+          <a:fontRef idx="minor">
+            <a:schemeClr val="lt1"/>
+          </a:fontRef>
+        </p:style>
+        <p:txBody>
+          <a:bodyPr rtlCol="0" anchor="ctr"/>
+          <a:lstStyle/>
+          <a:p>
+            <a:pPr algn="ctr"/>
+            <a:r>
+              <a:rPr lang="en-US" dirty="0">
+                <a:solidFill>
+                  <a:sysClr val="windowText" lastClr="000000"/>
+                </a:solidFill>
+              </a:rPr>
+              <a:t>Upload part</a:t>
+            </a:r>
+          </a:p>
+        </p:txBody>
+      </p:sp>
+      <p:pic>
+        <p:nvPicPr>
+          <p:cNvPr id="4" name="Picture 3">
+            <a:extLst>
+              <a:ext uri="{FF2B5EF4-FFF2-40B4-BE49-F238E27FC236}">
+                <a16:creationId xmlns:a16="http://schemas.microsoft.com/office/drawing/2014/main" id="{C7F198A2-BBDA-F594-267C-D902E78B2CDF}"/>
+              </a:ext>
+            </a:extLst>
+          </p:cNvPr>
+          <p:cNvPicPr>
+            <a:picLocks noChangeAspect="1"/>
+          </p:cNvPicPr>
+          <p:nvPr/>
+        </p:nvPicPr>
+        <p:blipFill>
+          <a:blip r:embed="rId2"/>
+          <a:stretch>
+            <a:fillRect/>
+          </a:stretch>
+        </p:blipFill>
+        <p:spPr>
+          <a:xfrm>
+            <a:off x="1515438" y="1302159"/>
+            <a:ext cx="863600" cy="749300"/>
+          </a:xfrm>
+          <a:prstGeom prst="rect">
+            <a:avLst/>
+          </a:prstGeom>
+        </p:spPr>
+      </p:pic>
+      <p:pic>
+        <p:nvPicPr>
+          <p:cNvPr id="5" name="Picture 4">
+            <a:extLst>
+              <a:ext uri="{FF2B5EF4-FFF2-40B4-BE49-F238E27FC236}">
+                <a16:creationId xmlns:a16="http://schemas.microsoft.com/office/drawing/2014/main" id="{69299863-0220-C152-5DC7-AA6C7265DDFC}"/>
+              </a:ext>
+            </a:extLst>
+          </p:cNvPr>
+          <p:cNvPicPr>
+            <a:picLocks noChangeAspect="1"/>
+          </p:cNvPicPr>
+          <p:nvPr/>
+        </p:nvPicPr>
+        <p:blipFill>
+          <a:blip r:embed="rId2"/>
+          <a:stretch>
+            <a:fillRect/>
+          </a:stretch>
+        </p:blipFill>
+        <p:spPr>
+          <a:xfrm>
+            <a:off x="2126578" y="989406"/>
+            <a:ext cx="863600" cy="749300"/>
+          </a:xfrm>
+          <a:prstGeom prst="rect">
+            <a:avLst/>
+          </a:prstGeom>
+        </p:spPr>
+      </p:pic>
+      <p:pic>
+        <p:nvPicPr>
+          <p:cNvPr id="6" name="Picture 5">
+            <a:extLst>
+              <a:ext uri="{FF2B5EF4-FFF2-40B4-BE49-F238E27FC236}">
+                <a16:creationId xmlns:a16="http://schemas.microsoft.com/office/drawing/2014/main" id="{5043293D-FC3B-0FC6-3E77-0E0297F56AE6}"/>
+              </a:ext>
+            </a:extLst>
+          </p:cNvPr>
+          <p:cNvPicPr>
+            <a:picLocks noChangeAspect="1"/>
+          </p:cNvPicPr>
+          <p:nvPr/>
+        </p:nvPicPr>
+        <p:blipFill>
+          <a:blip r:embed="rId2"/>
+          <a:stretch>
+            <a:fillRect/>
+          </a:stretch>
+        </p:blipFill>
+        <p:spPr>
+          <a:xfrm>
+            <a:off x="2737718" y="1302159"/>
+            <a:ext cx="863600" cy="749300"/>
+          </a:xfrm>
+          <a:prstGeom prst="rect">
+            <a:avLst/>
+          </a:prstGeom>
+        </p:spPr>
+      </p:pic>
+      <p:pic>
+        <p:nvPicPr>
+          <p:cNvPr id="7" name="Picture 6">
+            <a:extLst>
+              <a:ext uri="{FF2B5EF4-FFF2-40B4-BE49-F238E27FC236}">
+                <a16:creationId xmlns:a16="http://schemas.microsoft.com/office/drawing/2014/main" id="{CE3AA981-D570-A527-8264-0AE61E27DF3D}"/>
+              </a:ext>
+            </a:extLst>
+          </p:cNvPr>
+          <p:cNvPicPr>
+            <a:picLocks noChangeAspect="1"/>
+          </p:cNvPicPr>
+          <p:nvPr/>
+        </p:nvPicPr>
+        <p:blipFill>
+          <a:blip r:embed="rId3"/>
+          <a:stretch>
+            <a:fillRect/>
+          </a:stretch>
+        </p:blipFill>
+        <p:spPr>
+          <a:xfrm>
+            <a:off x="786017" y="2410135"/>
+            <a:ext cx="889000" cy="850900"/>
+          </a:xfrm>
+          <a:prstGeom prst="rect">
+            <a:avLst/>
+          </a:prstGeom>
+        </p:spPr>
+      </p:pic>
+      <p:pic>
+        <p:nvPicPr>
+          <p:cNvPr id="8" name="Picture 7">
+            <a:extLst>
+              <a:ext uri="{FF2B5EF4-FFF2-40B4-BE49-F238E27FC236}">
+                <a16:creationId xmlns:a16="http://schemas.microsoft.com/office/drawing/2014/main" id="{7083D709-C740-4683-1E62-25BE978130C3}"/>
+              </a:ext>
+            </a:extLst>
+          </p:cNvPr>
+          <p:cNvPicPr>
+            <a:picLocks noChangeAspect="1"/>
+          </p:cNvPicPr>
+          <p:nvPr/>
+        </p:nvPicPr>
+        <p:blipFill>
+          <a:blip r:embed="rId3"/>
+          <a:stretch>
+            <a:fillRect/>
+          </a:stretch>
+        </p:blipFill>
+        <p:spPr>
+          <a:xfrm>
+            <a:off x="573467" y="2968416"/>
+            <a:ext cx="889000" cy="850900"/>
+          </a:xfrm>
+          <a:prstGeom prst="rect">
+            <a:avLst/>
+          </a:prstGeom>
+        </p:spPr>
+      </p:pic>
+      <p:pic>
+        <p:nvPicPr>
+          <p:cNvPr id="9" name="Picture 8">
+            <a:extLst>
+              <a:ext uri="{FF2B5EF4-FFF2-40B4-BE49-F238E27FC236}">
+                <a16:creationId xmlns:a16="http://schemas.microsoft.com/office/drawing/2014/main" id="{A3FEDA73-DAC1-5FB4-A0BE-28F6513FA669}"/>
+              </a:ext>
+            </a:extLst>
+          </p:cNvPr>
+          <p:cNvPicPr>
+            <a:picLocks noChangeAspect="1"/>
+          </p:cNvPicPr>
+          <p:nvPr/>
+        </p:nvPicPr>
+        <p:blipFill>
+          <a:blip r:embed="rId3"/>
+          <a:stretch>
+            <a:fillRect/>
+          </a:stretch>
+        </p:blipFill>
+        <p:spPr>
+          <a:xfrm>
+            <a:off x="1069134" y="3615205"/>
+            <a:ext cx="889000" cy="850900"/>
+          </a:xfrm>
+          <a:prstGeom prst="rect">
+            <a:avLst/>
+          </a:prstGeom>
+        </p:spPr>
+      </p:pic>
+      <p:pic>
+        <p:nvPicPr>
+          <p:cNvPr id="10" name="Picture 9">
+            <a:extLst>
+              <a:ext uri="{FF2B5EF4-FFF2-40B4-BE49-F238E27FC236}">
+                <a16:creationId xmlns:a16="http://schemas.microsoft.com/office/drawing/2014/main" id="{F5576962-D02E-8567-A161-01E65DC51D94}"/>
+              </a:ext>
+            </a:extLst>
+          </p:cNvPr>
+          <p:cNvPicPr>
+            <a:picLocks noChangeAspect="1"/>
+          </p:cNvPicPr>
+          <p:nvPr/>
+        </p:nvPicPr>
+        <p:blipFill>
+          <a:blip r:embed="rId4"/>
+          <a:stretch>
+            <a:fillRect/>
+          </a:stretch>
+        </p:blipFill>
+        <p:spPr>
+          <a:xfrm>
+            <a:off x="2709497" y="3937567"/>
+            <a:ext cx="876300" cy="901700"/>
+          </a:xfrm>
+          <a:prstGeom prst="rect">
+            <a:avLst/>
+          </a:prstGeom>
+        </p:spPr>
+      </p:pic>
+      <p:pic>
+        <p:nvPicPr>
+          <p:cNvPr id="11" name="Picture 10">
+            <a:extLst>
+              <a:ext uri="{FF2B5EF4-FFF2-40B4-BE49-F238E27FC236}">
+                <a16:creationId xmlns:a16="http://schemas.microsoft.com/office/drawing/2014/main" id="{8C2694DF-19FA-5526-4A89-3B91DE84ACB3}"/>
+              </a:ext>
+            </a:extLst>
+          </p:cNvPr>
+          <p:cNvPicPr>
+            <a:picLocks noChangeAspect="1"/>
+          </p:cNvPicPr>
+          <p:nvPr/>
+        </p:nvPicPr>
+        <p:blipFill>
+          <a:blip r:embed="rId4"/>
+          <a:stretch>
+            <a:fillRect/>
+          </a:stretch>
+        </p:blipFill>
+        <p:spPr>
+          <a:xfrm>
+            <a:off x="3421836" y="3567884"/>
+            <a:ext cx="876300" cy="901700"/>
+          </a:xfrm>
+          <a:prstGeom prst="rect">
+            <a:avLst/>
+          </a:prstGeom>
+        </p:spPr>
+      </p:pic>
+      <p:pic>
+        <p:nvPicPr>
+          <p:cNvPr id="12" name="Picture 11">
+            <a:extLst>
+              <a:ext uri="{FF2B5EF4-FFF2-40B4-BE49-F238E27FC236}">
+                <a16:creationId xmlns:a16="http://schemas.microsoft.com/office/drawing/2014/main" id="{93341644-A71F-AB44-46AC-4B10C1593B7B}"/>
+              </a:ext>
+            </a:extLst>
+          </p:cNvPr>
+          <p:cNvPicPr>
+            <a:picLocks noChangeAspect="1"/>
+          </p:cNvPicPr>
+          <p:nvPr/>
+        </p:nvPicPr>
+        <p:blipFill>
+          <a:blip r:embed="rId4"/>
+          <a:stretch>
+            <a:fillRect/>
+          </a:stretch>
+        </p:blipFill>
+        <p:spPr>
+          <a:xfrm>
+            <a:off x="3745686" y="2872125"/>
+            <a:ext cx="876300" cy="901700"/>
+          </a:xfrm>
+          <a:prstGeom prst="rect">
+            <a:avLst/>
+          </a:prstGeom>
+        </p:spPr>
+      </p:pic>
+      <p:sp>
+        <p:nvSpPr>
+          <p:cNvPr id="13" name="TextBox 12">
+            <a:extLst>
+              <a:ext uri="{FF2B5EF4-FFF2-40B4-BE49-F238E27FC236}">
+                <a16:creationId xmlns:a16="http://schemas.microsoft.com/office/drawing/2014/main" id="{964DF31F-4191-EBC8-F287-9BB28F6711FF}"/>
+              </a:ext>
+            </a:extLst>
+          </p:cNvPr>
+          <p:cNvSpPr txBox="1"/>
+          <p:nvPr/>
+        </p:nvSpPr>
+        <p:spPr>
+          <a:xfrm>
+            <a:off x="620221" y="463474"/>
+            <a:ext cx="1220591" cy="369332"/>
+          </a:xfrm>
+          <a:prstGeom prst="rect">
+            <a:avLst/>
+          </a:prstGeom>
+          <a:noFill/>
+        </p:spPr>
+        <p:txBody>
+          <a:bodyPr wrap="none" rtlCol="0">
+            <a:spAutoFit/>
+          </a:bodyPr>
+          <a:lstStyle/>
+          <a:p>
+            <a:r>
+              <a:rPr lang="en-US" dirty="0">
+                <a:solidFill>
+                  <a:schemeClr val="tx1">
+                    <a:lumMod val="50000"/>
+                    <a:lumOff val="50000"/>
+                  </a:schemeClr>
+                </a:solidFill>
+              </a:rPr>
+              <a:t>STEP 1: XX</a:t>
+            </a:r>
+          </a:p>
+        </p:txBody>
+      </p:sp>
+      <p:sp>
+        <p:nvSpPr>
+          <p:cNvPr id="14" name="TextBox 13">
+            <a:extLst>
+              <a:ext uri="{FF2B5EF4-FFF2-40B4-BE49-F238E27FC236}">
+                <a16:creationId xmlns:a16="http://schemas.microsoft.com/office/drawing/2014/main" id="{E4850F3B-2FE4-433B-4A7B-7BDDD260CF7E}"/>
+              </a:ext>
+            </a:extLst>
+          </p:cNvPr>
+          <p:cNvSpPr txBox="1"/>
+          <p:nvPr/>
+        </p:nvSpPr>
+        <p:spPr>
+          <a:xfrm>
+            <a:off x="5513220" y="1868352"/>
+            <a:ext cx="1220591" cy="369332"/>
+          </a:xfrm>
+          <a:prstGeom prst="rect">
+            <a:avLst/>
+          </a:prstGeom>
+          <a:noFill/>
+        </p:spPr>
+        <p:txBody>
+          <a:bodyPr wrap="none" rtlCol="0">
+            <a:spAutoFit/>
+          </a:bodyPr>
+          <a:lstStyle/>
+          <a:p>
+            <a:r>
+              <a:rPr lang="en-US" dirty="0">
+                <a:solidFill>
+                  <a:schemeClr val="tx1">
+                    <a:lumMod val="50000"/>
+                    <a:lumOff val="50000"/>
+                  </a:schemeClr>
+                </a:solidFill>
+              </a:rPr>
+              <a:t>STEP 2: XX</a:t>
+            </a:r>
+          </a:p>
+        </p:txBody>
+      </p:sp>
+      <p:sp>
+        <p:nvSpPr>
+          <p:cNvPr id="15" name="TextBox 14">
+            <a:extLst>
+              <a:ext uri="{FF2B5EF4-FFF2-40B4-BE49-F238E27FC236}">
+                <a16:creationId xmlns:a16="http://schemas.microsoft.com/office/drawing/2014/main" id="{09ACD8D0-FB29-14EA-8F7D-22521D007AAF}"/>
+              </a:ext>
+            </a:extLst>
+          </p:cNvPr>
+          <p:cNvSpPr txBox="1"/>
+          <p:nvPr/>
+        </p:nvSpPr>
+        <p:spPr>
+          <a:xfrm>
+            <a:off x="5537696" y="2337705"/>
+            <a:ext cx="1328312" cy="923330"/>
+          </a:xfrm>
+          <a:prstGeom prst="rect">
+            <a:avLst/>
+          </a:prstGeom>
+          <a:noFill/>
+        </p:spPr>
+        <p:txBody>
+          <a:bodyPr wrap="none" rtlCol="0">
+            <a:spAutoFit/>
+          </a:bodyPr>
+          <a:lstStyle/>
+          <a:p>
+            <a:pPr marL="285750" indent="-285750">
+              <a:buFont typeface="Arial" panose="020B0604020202020204" pitchFamily="34" charset="0"/>
+              <a:buChar char="•"/>
+            </a:pPr>
+            <a:r>
+              <a:rPr lang="en-US" dirty="0">
+                <a:solidFill>
+                  <a:schemeClr val="tx1">
+                    <a:lumMod val="50000"/>
+                    <a:lumOff val="50000"/>
+                  </a:schemeClr>
+                </a:solidFill>
+              </a:rPr>
+              <a:t>GPT</a:t>
+            </a:r>
+          </a:p>
+          <a:p>
+            <a:pPr marL="285750" indent="-285750">
+              <a:buFont typeface="Arial" panose="020B0604020202020204" pitchFamily="34" charset="0"/>
+              <a:buChar char="•"/>
+            </a:pPr>
+            <a:r>
+              <a:rPr lang="en-US" dirty="0">
+                <a:solidFill>
+                  <a:schemeClr val="tx1">
+                    <a:lumMod val="50000"/>
+                    <a:lumOff val="50000"/>
+                  </a:schemeClr>
+                </a:solidFill>
+              </a:rPr>
+              <a:t>GEMINI</a:t>
+            </a:r>
+          </a:p>
+          <a:p>
+            <a:pPr marL="285750" indent="-285750">
+              <a:buFont typeface="Arial" panose="020B0604020202020204" pitchFamily="34" charset="0"/>
+              <a:buChar char="•"/>
+            </a:pPr>
+            <a:r>
+              <a:rPr lang="en-US" dirty="0">
+                <a:solidFill>
+                  <a:schemeClr val="tx1">
+                    <a:lumMod val="50000"/>
+                    <a:lumOff val="50000"/>
+                  </a:schemeClr>
+                </a:solidFill>
+              </a:rPr>
+              <a:t>CLAUDE</a:t>
+            </a:r>
+          </a:p>
+        </p:txBody>
+      </p:sp>
+      <p:sp>
+        <p:nvSpPr>
+          <p:cNvPr id="16" name="TextBox 15">
+            <a:extLst>
+              <a:ext uri="{FF2B5EF4-FFF2-40B4-BE49-F238E27FC236}">
+                <a16:creationId xmlns:a16="http://schemas.microsoft.com/office/drawing/2014/main" id="{01AD28A0-C6D2-A4B7-AF74-A9F6BE6876FB}"/>
+              </a:ext>
+            </a:extLst>
+          </p:cNvPr>
+          <p:cNvSpPr txBox="1"/>
+          <p:nvPr/>
+        </p:nvSpPr>
+        <p:spPr>
+          <a:xfrm>
+            <a:off x="8502762" y="1837814"/>
+            <a:ext cx="1220591" cy="369332"/>
+          </a:xfrm>
+          <a:prstGeom prst="rect">
+            <a:avLst/>
+          </a:prstGeom>
+          <a:noFill/>
+        </p:spPr>
+        <p:txBody>
+          <a:bodyPr wrap="none" rtlCol="0">
+            <a:spAutoFit/>
+          </a:bodyPr>
+          <a:lstStyle/>
+          <a:p>
+            <a:r>
+              <a:rPr lang="en-US" dirty="0">
+                <a:solidFill>
+                  <a:schemeClr val="tx1">
+                    <a:lumMod val="50000"/>
+                    <a:lumOff val="50000"/>
+                  </a:schemeClr>
+                </a:solidFill>
+              </a:rPr>
+              <a:t>STEP 3: XX</a:t>
+            </a:r>
+          </a:p>
+        </p:txBody>
+      </p:sp>
+      <p:sp>
+        <p:nvSpPr>
+          <p:cNvPr id="17" name="TextBox 16">
+            <a:extLst>
+              <a:ext uri="{FF2B5EF4-FFF2-40B4-BE49-F238E27FC236}">
+                <a16:creationId xmlns:a16="http://schemas.microsoft.com/office/drawing/2014/main" id="{15242902-55EC-D7A1-5500-B3502B442A32}"/>
+              </a:ext>
+            </a:extLst>
+          </p:cNvPr>
+          <p:cNvSpPr txBox="1"/>
+          <p:nvPr/>
+        </p:nvSpPr>
+        <p:spPr>
+          <a:xfrm>
+            <a:off x="8527238" y="2307167"/>
+            <a:ext cx="866712" cy="369332"/>
+          </a:xfrm>
+          <a:prstGeom prst="rect">
+            <a:avLst/>
+          </a:prstGeom>
+          <a:noFill/>
+        </p:spPr>
+        <p:txBody>
+          <a:bodyPr wrap="none" rtlCol="0">
+            <a:spAutoFit/>
+          </a:bodyPr>
+          <a:lstStyle/>
+          <a:p>
+            <a:r>
+              <a:rPr lang="en-US" dirty="0">
+                <a:solidFill>
+                  <a:schemeClr val="tx1">
+                    <a:lumMod val="50000"/>
+                    <a:lumOff val="50000"/>
+                  </a:schemeClr>
+                </a:solidFill>
+              </a:rPr>
+              <a:t>results</a:t>
+            </a:r>
+          </a:p>
+        </p:txBody>
+      </p:sp>
+      <p:sp>
+        <p:nvSpPr>
+          <p:cNvPr id="18" name="TextBox 17">
+            <a:extLst>
+              <a:ext uri="{FF2B5EF4-FFF2-40B4-BE49-F238E27FC236}">
+                <a16:creationId xmlns:a16="http://schemas.microsoft.com/office/drawing/2014/main" id="{4BC58BD9-D8F8-7EEC-17ED-3A29E8271F3E}"/>
+              </a:ext>
+            </a:extLst>
+          </p:cNvPr>
+          <p:cNvSpPr txBox="1"/>
+          <p:nvPr/>
+        </p:nvSpPr>
+        <p:spPr>
+          <a:xfrm>
+            <a:off x="2136467" y="630730"/>
+            <a:ext cx="1587229" cy="369332"/>
+          </a:xfrm>
+          <a:prstGeom prst="rect">
+            <a:avLst/>
+          </a:prstGeom>
+          <a:noFill/>
+        </p:spPr>
+        <p:txBody>
+          <a:bodyPr wrap="none" rtlCol="0">
+            <a:spAutoFit/>
+          </a:bodyPr>
+          <a:lstStyle/>
+          <a:p>
+            <a:r>
+              <a:rPr lang="en-US" dirty="0">
+                <a:solidFill>
+                  <a:schemeClr val="tx1">
+                    <a:lumMod val="50000"/>
+                    <a:lumOff val="50000"/>
+                  </a:schemeClr>
+                </a:solidFill>
+              </a:rPr>
+              <a:t>visible images</a:t>
+            </a:r>
+          </a:p>
+        </p:txBody>
+      </p:sp>
+      <p:sp>
+        <p:nvSpPr>
+          <p:cNvPr id="19" name="TextBox 18">
+            <a:extLst>
+              <a:ext uri="{FF2B5EF4-FFF2-40B4-BE49-F238E27FC236}">
+                <a16:creationId xmlns:a16="http://schemas.microsoft.com/office/drawing/2014/main" id="{C54C6D2A-FAD3-0D7D-33F0-9C668D8D3BBA}"/>
+              </a:ext>
+            </a:extLst>
+          </p:cNvPr>
+          <p:cNvSpPr txBox="1"/>
+          <p:nvPr/>
+        </p:nvSpPr>
+        <p:spPr>
+          <a:xfrm>
+            <a:off x="3828371" y="2539071"/>
+            <a:ext cx="1149610" cy="369332"/>
+          </a:xfrm>
+          <a:prstGeom prst="rect">
+            <a:avLst/>
+          </a:prstGeom>
+          <a:noFill/>
+        </p:spPr>
+        <p:txBody>
+          <a:bodyPr wrap="none" rtlCol="0">
+            <a:spAutoFit/>
+          </a:bodyPr>
+          <a:lstStyle/>
+          <a:p>
+            <a:r>
+              <a:rPr lang="en-US" dirty="0">
+                <a:solidFill>
+                  <a:schemeClr val="tx1">
+                    <a:lumMod val="50000"/>
+                    <a:lumOff val="50000"/>
+                  </a:schemeClr>
+                </a:solidFill>
+              </a:rPr>
+              <a:t>IR images</a:t>
+            </a:r>
+          </a:p>
+        </p:txBody>
+      </p:sp>
+      <p:sp>
+        <p:nvSpPr>
+          <p:cNvPr id="20" name="TextBox 19">
+            <a:extLst>
+              <a:ext uri="{FF2B5EF4-FFF2-40B4-BE49-F238E27FC236}">
+                <a16:creationId xmlns:a16="http://schemas.microsoft.com/office/drawing/2014/main" id="{79B3FF9E-9F67-9A8C-B734-91078CA2EF6C}"/>
+              </a:ext>
+            </a:extLst>
+          </p:cNvPr>
+          <p:cNvSpPr txBox="1"/>
+          <p:nvPr/>
+        </p:nvSpPr>
+        <p:spPr>
+          <a:xfrm>
+            <a:off x="312857" y="2027221"/>
+            <a:ext cx="1194494" cy="369332"/>
+          </a:xfrm>
+          <a:prstGeom prst="rect">
+            <a:avLst/>
+          </a:prstGeom>
+          <a:noFill/>
+        </p:spPr>
+        <p:txBody>
+          <a:bodyPr wrap="none" rtlCol="0">
+            <a:spAutoFit/>
+          </a:bodyPr>
+          <a:lstStyle/>
+          <a:p>
+            <a:r>
+              <a:rPr lang="en-US" dirty="0">
+                <a:solidFill>
+                  <a:schemeClr val="tx1">
+                    <a:lumMod val="50000"/>
+                    <a:lumOff val="50000"/>
+                  </a:schemeClr>
+                </a:solidFill>
+              </a:rPr>
+              <a:t>EL images</a:t>
+            </a:r>
+          </a:p>
+        </p:txBody>
+      </p:sp>
+      <p:sp>
+        <p:nvSpPr>
+          <p:cNvPr id="21" name="Rectangle 20">
+            <a:extLst>
+              <a:ext uri="{FF2B5EF4-FFF2-40B4-BE49-F238E27FC236}">
+                <a16:creationId xmlns:a16="http://schemas.microsoft.com/office/drawing/2014/main" id="{845ED14E-5111-B4B9-48A0-C644C755C392}"/>
+              </a:ext>
+            </a:extLst>
+          </p:cNvPr>
+          <p:cNvSpPr/>
+          <p:nvPr/>
+        </p:nvSpPr>
+        <p:spPr>
+          <a:xfrm>
+            <a:off x="210727" y="5330913"/>
+            <a:ext cx="11407806" cy="5195157"/>
+          </a:xfrm>
+          <a:prstGeom prst="rect">
+            <a:avLst/>
+          </a:prstGeom>
+          <a:gradFill flip="none" rotWithShape="1">
+            <a:gsLst>
+              <a:gs pos="0">
+                <a:schemeClr val="bg2">
+                  <a:lumMod val="90000"/>
+                </a:schemeClr>
+              </a:gs>
+              <a:gs pos="100000">
+                <a:schemeClr val="tx2">
+                  <a:lumMod val="10000"/>
+                  <a:lumOff val="90000"/>
+                </a:schemeClr>
+              </a:gs>
+            </a:gsLst>
+            <a:lin ang="13500000" scaled="1"/>
+            <a:tileRect/>
+          </a:gradFill>
+          <a:ln>
+            <a:noFill/>
+          </a:ln>
+        </p:spPr>
+        <p:style>
+          <a:lnRef idx="2">
+            <a:schemeClr val="accent1">
+              <a:shade val="15000"/>
+            </a:schemeClr>
+          </a:lnRef>
+          <a:fillRef idx="1">
+            <a:schemeClr val="accent1"/>
+          </a:fillRef>
+          <a:effectRef idx="0">
+            <a:schemeClr val="accent1"/>
+          </a:effectRef>
+          <a:fontRef idx="minor">
+            <a:schemeClr val="lt1"/>
+          </a:fontRef>
+        </p:style>
+        <p:txBody>
+          <a:bodyPr rtlCol="0" anchor="ctr"/>
+          <a:lstStyle/>
+          <a:p>
+            <a:pPr algn="ctr"/>
+            <a:endParaRPr lang="en-US"/>
+          </a:p>
+        </p:txBody>
+      </p:sp>
+      <p:sp>
+        <p:nvSpPr>
+          <p:cNvPr id="22" name="TextBox 21">
+            <a:extLst>
+              <a:ext uri="{FF2B5EF4-FFF2-40B4-BE49-F238E27FC236}">
+                <a16:creationId xmlns:a16="http://schemas.microsoft.com/office/drawing/2014/main" id="{8513E3E0-AA33-14E8-143A-F8D1759442C2}"/>
+              </a:ext>
+            </a:extLst>
+          </p:cNvPr>
+          <p:cNvSpPr txBox="1"/>
+          <p:nvPr/>
+        </p:nvSpPr>
+        <p:spPr>
+          <a:xfrm>
+            <a:off x="612395" y="5588545"/>
+            <a:ext cx="1601913" cy="369332"/>
+          </a:xfrm>
+          <a:prstGeom prst="rect">
+            <a:avLst/>
+          </a:prstGeom>
+          <a:noFill/>
+        </p:spPr>
+        <p:txBody>
+          <a:bodyPr wrap="none" rtlCol="0">
+            <a:spAutoFit/>
+          </a:bodyPr>
+          <a:lstStyle/>
+          <a:p>
+            <a:r>
+              <a:rPr lang="en-US" dirty="0">
+                <a:solidFill>
+                  <a:schemeClr val="tx1">
+                    <a:lumMod val="50000"/>
+                    <a:lumOff val="50000"/>
+                  </a:schemeClr>
+                </a:solidFill>
+              </a:rPr>
+              <a:t>Image dataset</a:t>
+            </a:r>
+          </a:p>
+        </p:txBody>
+      </p:sp>
+      <p:sp>
+        <p:nvSpPr>
+          <p:cNvPr id="23" name="TextBox 22">
+            <a:extLst>
+              <a:ext uri="{FF2B5EF4-FFF2-40B4-BE49-F238E27FC236}">
+                <a16:creationId xmlns:a16="http://schemas.microsoft.com/office/drawing/2014/main" id="{FF1412C9-6880-C1CA-6EA1-79D54A4D779A}"/>
+              </a:ext>
+            </a:extLst>
+          </p:cNvPr>
+          <p:cNvSpPr txBox="1"/>
+          <p:nvPr/>
+        </p:nvSpPr>
+        <p:spPr>
+          <a:xfrm>
+            <a:off x="7382139" y="5588545"/>
+            <a:ext cx="1376402" cy="369332"/>
+          </a:xfrm>
+          <a:prstGeom prst="rect">
+            <a:avLst/>
+          </a:prstGeom>
+          <a:noFill/>
+        </p:spPr>
+        <p:txBody>
+          <a:bodyPr wrap="none" rtlCol="0">
+            <a:spAutoFit/>
+          </a:bodyPr>
+          <a:lstStyle/>
+          <a:p>
+            <a:r>
+              <a:rPr lang="en-US" dirty="0">
+                <a:solidFill>
+                  <a:schemeClr val="tx1">
+                    <a:lumMod val="50000"/>
+                    <a:lumOff val="50000"/>
+                  </a:schemeClr>
+                </a:solidFill>
+              </a:rPr>
+              <a:t>Result table</a:t>
+            </a:r>
+          </a:p>
+        </p:txBody>
+      </p:sp>
+      <p:sp>
+        <p:nvSpPr>
+          <p:cNvPr id="24" name="TextBox 23">
+            <a:extLst>
+              <a:ext uri="{FF2B5EF4-FFF2-40B4-BE49-F238E27FC236}">
+                <a16:creationId xmlns:a16="http://schemas.microsoft.com/office/drawing/2014/main" id="{DB2FF071-3A55-946E-3BFC-8B52156E02D6}"/>
+              </a:ext>
+            </a:extLst>
+          </p:cNvPr>
+          <p:cNvSpPr txBox="1"/>
+          <p:nvPr/>
+        </p:nvSpPr>
+        <p:spPr>
+          <a:xfrm>
+            <a:off x="4960697" y="-60520"/>
+            <a:ext cx="997389" cy="584775"/>
+          </a:xfrm>
+          <a:prstGeom prst="rect">
+            <a:avLst/>
+          </a:prstGeom>
+          <a:noFill/>
+        </p:spPr>
+        <p:txBody>
+          <a:bodyPr wrap="none" rtlCol="0">
+            <a:spAutoFit/>
+          </a:bodyPr>
+          <a:lstStyle/>
+          <a:p>
+            <a:r>
+              <a:rPr lang="en-US" sz="3200" b="1" dirty="0">
+                <a:solidFill>
+                  <a:schemeClr val="tx1">
+                    <a:lumMod val="50000"/>
+                    <a:lumOff val="50000"/>
+                  </a:schemeClr>
+                </a:solidFill>
+              </a:rPr>
+              <a:t>Title</a:t>
+            </a:r>
+          </a:p>
+        </p:txBody>
+      </p:sp>
+    </p:spTree>
+    <p:extLst>
+      <p:ext uri="{BB962C8B-B14F-4D97-AF65-F5344CB8AC3E}">
+        <p14:creationId xmlns:p14="http://schemas.microsoft.com/office/powerpoint/2010/main" val="1768575448"/>
+      </p:ext>
+    </p:extLst>
+  </p:cSld>
+  <p:clrMapOvr>
+    <a:masterClrMapping/>
+  </p:clrMapOvr>
+</p:sld>
+</file>
+
+<file path=ppt/slides/slide3.xml><?xml version="1.0" encoding="utf-8"?>
+<p:sld xmlns:a="http://schemas.openxmlformats.org/drawingml/2006/main" xmlns:r="http://schemas.openxmlformats.org/officeDocument/2006/relationships" xmlns:p="http://schemas.openxmlformats.org/presentationml/2006/main">
+  <p:cSld>
+    <p:spTree>
+      <p:nvGrpSpPr>
         <p:cNvPr id="1" name="">
           <a:extLst>
             <a:ext uri="{FF2B5EF4-FFF2-40B4-BE49-F238E27FC236}">
@@ -3571,7 +4642,7 @@
 </p:sld>
 </file>
 
-<file path=ppt/slides/slide3.xml><?xml version="1.0" encoding="utf-8"?>
+<file path=ppt/slides/slide4.xml><?xml version="1.0" encoding="utf-8"?>
 <p:sld xmlns:a="http://schemas.openxmlformats.org/drawingml/2006/main" xmlns:r="http://schemas.openxmlformats.org/officeDocument/2006/relationships" xmlns:p="http://schemas.openxmlformats.org/presentationml/2006/main">
   <p:cSld>
     <p:spTree>
@@ -3725,314 +4796,6 @@
 </p:sld>
 </file>
 
-<file path=ppt/slides/slide4.xml><?xml version="1.0" encoding="utf-8"?>
-<p:sld xmlns:a="http://schemas.openxmlformats.org/drawingml/2006/main" xmlns:r="http://schemas.openxmlformats.org/officeDocument/2006/relationships" xmlns:p="http://schemas.openxmlformats.org/presentationml/2006/main">
-  <p:cSld>
-    <p:spTree>
-      <p:nvGrpSpPr>
-        <p:cNvPr id="1" name=""/>
-        <p:cNvGrpSpPr/>
-        <p:nvPr/>
-      </p:nvGrpSpPr>
-      <p:grpSpPr>
-        <a:xfrm>
-          <a:off x="0" y="0"/>
-          <a:ext cx="0" cy="0"/>
-          <a:chOff x="0" y="0"/>
-          <a:chExt cx="0" cy="0"/>
-        </a:xfrm>
-      </p:grpSpPr>
-      <p:sp>
-        <p:nvSpPr>
-          <p:cNvPr id="2" name="Rounded Rectangle 1">
-            <a:extLst>
-              <a:ext uri="{FF2B5EF4-FFF2-40B4-BE49-F238E27FC236}">
-                <a16:creationId xmlns:a16="http://schemas.microsoft.com/office/drawing/2014/main" id="{A24AC58E-465E-24AC-614A-7931357D3079}"/>
-              </a:ext>
-            </a:extLst>
-          </p:cNvPr>
-          <p:cNvSpPr/>
-          <p:nvPr/>
-        </p:nvSpPr>
-        <p:spPr>
-          <a:xfrm>
-            <a:off x="3301176" y="2805544"/>
-            <a:ext cx="1702130" cy="623454"/>
-          </a:xfrm>
-          <a:prstGeom prst="roundRect">
-            <a:avLst/>
-          </a:prstGeom>
-          <a:solidFill>
-            <a:srgbClr val="4ACDFE"/>
-          </a:solidFill>
-        </p:spPr>
-        <p:style>
-          <a:lnRef idx="2">
-            <a:schemeClr val="accent1">
-              <a:shade val="15000"/>
-            </a:schemeClr>
-          </a:lnRef>
-          <a:fillRef idx="1">
-            <a:schemeClr val="accent1"/>
-          </a:fillRef>
-          <a:effectRef idx="0">
-            <a:schemeClr val="accent1"/>
-          </a:effectRef>
-          <a:fontRef idx="minor">
-            <a:schemeClr val="lt1"/>
-          </a:fontRef>
-        </p:style>
-        <p:txBody>
-          <a:bodyPr rtlCol="0" anchor="ctr"/>
-          <a:lstStyle/>
-          <a:p>
-            <a:pPr algn="ctr"/>
-            <a:endParaRPr lang="en-US" sz="1500"/>
-          </a:p>
-        </p:txBody>
-      </p:sp>
-      <p:sp>
-        <p:nvSpPr>
-          <p:cNvPr id="3" name="Rounded Rectangle 2">
-            <a:extLst>
-              <a:ext uri="{FF2B5EF4-FFF2-40B4-BE49-F238E27FC236}">
-                <a16:creationId xmlns:a16="http://schemas.microsoft.com/office/drawing/2014/main" id="{91DA5EEE-6199-F68F-5AB7-141441A66C7E}"/>
-              </a:ext>
-            </a:extLst>
-          </p:cNvPr>
-          <p:cNvSpPr/>
-          <p:nvPr/>
-        </p:nvSpPr>
-        <p:spPr>
-          <a:xfrm>
-            <a:off x="6203208" y="2805545"/>
-            <a:ext cx="1702130" cy="623454"/>
-          </a:xfrm>
-          <a:prstGeom prst="roundRect">
-            <a:avLst/>
-          </a:prstGeom>
-          <a:solidFill>
-            <a:srgbClr val="D1D2E7"/>
-          </a:solidFill>
-        </p:spPr>
-        <p:style>
-          <a:lnRef idx="2">
-            <a:schemeClr val="accent1">
-              <a:shade val="15000"/>
-            </a:schemeClr>
-          </a:lnRef>
-          <a:fillRef idx="1">
-            <a:schemeClr val="accent1"/>
-          </a:fillRef>
-          <a:effectRef idx="0">
-            <a:schemeClr val="accent1"/>
-          </a:effectRef>
-          <a:fontRef idx="minor">
-            <a:schemeClr val="lt1"/>
-          </a:fontRef>
-        </p:style>
-        <p:txBody>
-          <a:bodyPr rtlCol="0" anchor="ctr"/>
-          <a:lstStyle/>
-          <a:p>
-            <a:pPr algn="ctr"/>
-            <a:endParaRPr lang="en-US" sz="1500"/>
-          </a:p>
-        </p:txBody>
-      </p:sp>
-      <p:sp>
-        <p:nvSpPr>
-          <p:cNvPr id="4" name="Rounded Rectangle 3">
-            <a:extLst>
-              <a:ext uri="{FF2B5EF4-FFF2-40B4-BE49-F238E27FC236}">
-                <a16:creationId xmlns:a16="http://schemas.microsoft.com/office/drawing/2014/main" id="{38C74A10-5598-7F80-5809-524CC3845A4A}"/>
-              </a:ext>
-            </a:extLst>
-          </p:cNvPr>
-          <p:cNvSpPr/>
-          <p:nvPr/>
-        </p:nvSpPr>
-        <p:spPr>
-          <a:xfrm>
-            <a:off x="399143" y="2805544"/>
-            <a:ext cx="1702130" cy="623454"/>
-          </a:xfrm>
-          <a:prstGeom prst="roundRect">
-            <a:avLst/>
-          </a:prstGeom>
-          <a:solidFill>
-            <a:srgbClr val="23A9E1"/>
-          </a:solidFill>
-        </p:spPr>
-        <p:style>
-          <a:lnRef idx="2">
-            <a:schemeClr val="accent1">
-              <a:shade val="15000"/>
-            </a:schemeClr>
-          </a:lnRef>
-          <a:fillRef idx="1">
-            <a:schemeClr val="accent1"/>
-          </a:fillRef>
-          <a:effectRef idx="0">
-            <a:schemeClr val="accent1"/>
-          </a:effectRef>
-          <a:fontRef idx="minor">
-            <a:schemeClr val="lt1"/>
-          </a:fontRef>
-        </p:style>
-        <p:txBody>
-          <a:bodyPr rtlCol="0" anchor="ctr"/>
-          <a:lstStyle/>
-          <a:p>
-            <a:pPr algn="ctr"/>
-            <a:endParaRPr lang="en-US" sz="1500"/>
-          </a:p>
-        </p:txBody>
-      </p:sp>
-      <p:sp>
-        <p:nvSpPr>
-          <p:cNvPr id="5" name="Rounded Rectangle 4">
-            <a:extLst>
-              <a:ext uri="{FF2B5EF4-FFF2-40B4-BE49-F238E27FC236}">
-                <a16:creationId xmlns:a16="http://schemas.microsoft.com/office/drawing/2014/main" id="{2BC9C30C-F426-DA72-BC38-B2BFF3BC077B}"/>
-              </a:ext>
-            </a:extLst>
-          </p:cNvPr>
-          <p:cNvSpPr/>
-          <p:nvPr/>
-        </p:nvSpPr>
-        <p:spPr>
-          <a:xfrm>
-            <a:off x="8944429" y="2805544"/>
-            <a:ext cx="1702130" cy="623454"/>
-          </a:xfrm>
-          <a:prstGeom prst="roundRect">
-            <a:avLst/>
-          </a:prstGeom>
-          <a:solidFill>
-            <a:srgbClr val="8D97CA"/>
-          </a:solidFill>
-        </p:spPr>
-        <p:style>
-          <a:lnRef idx="2">
-            <a:schemeClr val="accent1">
-              <a:shade val="15000"/>
-            </a:schemeClr>
-          </a:lnRef>
-          <a:fillRef idx="1">
-            <a:schemeClr val="accent1"/>
-          </a:fillRef>
-          <a:effectRef idx="0">
-            <a:schemeClr val="accent1"/>
-          </a:effectRef>
-          <a:fontRef idx="minor">
-            <a:schemeClr val="lt1"/>
-          </a:fontRef>
-        </p:style>
-        <p:txBody>
-          <a:bodyPr rtlCol="0" anchor="ctr"/>
-          <a:lstStyle/>
-          <a:p>
-            <a:pPr algn="ctr"/>
-            <a:endParaRPr lang="en-US" sz="1500"/>
-          </a:p>
-        </p:txBody>
-      </p:sp>
-      <p:pic>
-        <p:nvPicPr>
-          <p:cNvPr id="6" name="Picture 5">
-            <a:extLst>
-              <a:ext uri="{FF2B5EF4-FFF2-40B4-BE49-F238E27FC236}">
-                <a16:creationId xmlns:a16="http://schemas.microsoft.com/office/drawing/2014/main" id="{8D997F8C-026F-5B47-9737-1C8CF9CB003C}"/>
-              </a:ext>
-            </a:extLst>
-          </p:cNvPr>
-          <p:cNvPicPr>
-            <a:picLocks noChangeAspect="1"/>
-          </p:cNvPicPr>
-          <p:nvPr/>
-        </p:nvPicPr>
-        <p:blipFill>
-          <a:blip r:embed="rId2"/>
-          <a:stretch>
-            <a:fillRect/>
-          </a:stretch>
-        </p:blipFill>
-        <p:spPr>
-          <a:xfrm>
-            <a:off x="3655511" y="-3153696"/>
-            <a:ext cx="4148667" cy="4931833"/>
-          </a:xfrm>
-          <a:prstGeom prst="rect">
-            <a:avLst/>
-          </a:prstGeom>
-        </p:spPr>
-      </p:pic>
-      <p:sp>
-        <p:nvSpPr>
-          <p:cNvPr id="7" name="Rounded Rectangle 6">
-            <a:extLst>
-              <a:ext uri="{FF2B5EF4-FFF2-40B4-BE49-F238E27FC236}">
-                <a16:creationId xmlns:a16="http://schemas.microsoft.com/office/drawing/2014/main" id="{3399D38A-6858-1527-E456-B99D5D9318B8}"/>
-              </a:ext>
-            </a:extLst>
-          </p:cNvPr>
-          <p:cNvSpPr/>
-          <p:nvPr/>
-        </p:nvSpPr>
-        <p:spPr>
-          <a:xfrm>
-            <a:off x="4152241" y="4258623"/>
-            <a:ext cx="1702130" cy="623454"/>
-          </a:xfrm>
-          <a:prstGeom prst="roundRect">
-            <a:avLst/>
-          </a:prstGeom>
-          <a:solidFill>
-            <a:srgbClr val="D1D1D1"/>
-          </a:solidFill>
-          <a:ln>
-            <a:noFill/>
-          </a:ln>
-        </p:spPr>
-        <p:style>
-          <a:lnRef idx="2">
-            <a:schemeClr val="accent1">
-              <a:shade val="15000"/>
-            </a:schemeClr>
-          </a:lnRef>
-          <a:fillRef idx="1">
-            <a:schemeClr val="accent1"/>
-          </a:fillRef>
-          <a:effectRef idx="0">
-            <a:schemeClr val="accent1"/>
-          </a:effectRef>
-          <a:fontRef idx="minor">
-            <a:schemeClr val="lt1"/>
-          </a:fontRef>
-        </p:style>
-        <p:txBody>
-          <a:bodyPr rtlCol="0" anchor="ctr"/>
-          <a:lstStyle/>
-          <a:p>
-            <a:pPr algn="ctr"/>
-            <a:endParaRPr lang="en-US" sz="1500"/>
-          </a:p>
-        </p:txBody>
-      </p:sp>
-    </p:spTree>
-    <p:extLst>
-      <p:ext uri="{BB962C8B-B14F-4D97-AF65-F5344CB8AC3E}">
-        <p14:creationId xmlns:p14="http://schemas.microsoft.com/office/powerpoint/2010/main" val="3761357932"/>
-      </p:ext>
-    </p:extLst>
-  </p:cSld>
-  <p:clrMapOvr>
-    <a:masterClrMapping/>
-  </p:clrMapOvr>
-</p:sld>
-</file>
-
 <file path=ppt/slides/slide5.xml><?xml version="1.0" encoding="utf-8"?>
 <p:sld xmlns:a="http://schemas.openxmlformats.org/drawingml/2006/main" xmlns:r="http://schemas.openxmlformats.org/officeDocument/2006/relationships" xmlns:p="http://schemas.openxmlformats.org/presentationml/2006/main">
   <p:cSld>
@@ -4052,10 +4815,10 @@
       </p:grpSpPr>
       <p:sp>
         <p:nvSpPr>
-          <p:cNvPr id="2" name="Oval 1">
-            <a:extLst>
-              <a:ext uri="{FF2B5EF4-FFF2-40B4-BE49-F238E27FC236}">
-                <a16:creationId xmlns:a16="http://schemas.microsoft.com/office/drawing/2014/main" id="{99D07DEB-3C1B-2A10-A13A-90E5084B4DFC}"/>
+          <p:cNvPr id="2" name="Rounded Rectangle 1">
+            <a:extLst>
+              <a:ext uri="{FF2B5EF4-FFF2-40B4-BE49-F238E27FC236}">
+                <a16:creationId xmlns:a16="http://schemas.microsoft.com/office/drawing/2014/main" id="{A24AC58E-465E-24AC-614A-7931357D3079}"/>
               </a:ext>
             </a:extLst>
           </p:cNvPr>
@@ -4064,18 +4827,15 @@
         </p:nvSpPr>
         <p:spPr>
           <a:xfrm>
-            <a:off x="2978728" y="2115293"/>
-            <a:ext cx="415636" cy="405740"/>
-          </a:xfrm>
-          <a:prstGeom prst="ellipse">
+            <a:off x="3301176" y="2805544"/>
+            <a:ext cx="1702130" cy="623454"/>
+          </a:xfrm>
+          <a:prstGeom prst="roundRect">
             <a:avLst/>
           </a:prstGeom>
           <a:solidFill>
-            <a:srgbClr val="00B0F0"/>
+            <a:srgbClr val="4ACDFE"/>
           </a:solidFill>
-          <a:ln>
-            <a:noFill/>
-          </a:ln>
         </p:spPr>
         <p:style>
           <a:lnRef idx="2">
@@ -4104,10 +4864,10 @@
       </p:sp>
       <p:sp>
         <p:nvSpPr>
-          <p:cNvPr id="3" name="Oval 2">
-            <a:extLst>
-              <a:ext uri="{FF2B5EF4-FFF2-40B4-BE49-F238E27FC236}">
-                <a16:creationId xmlns:a16="http://schemas.microsoft.com/office/drawing/2014/main" id="{D701B6F8-CD93-98F8-E64D-51072F6999A8}"/>
+          <p:cNvPr id="3" name="Rounded Rectangle 2">
+            <a:extLst>
+              <a:ext uri="{FF2B5EF4-FFF2-40B4-BE49-F238E27FC236}">
+                <a16:creationId xmlns:a16="http://schemas.microsoft.com/office/drawing/2014/main" id="{91DA5EEE-6199-F68F-5AB7-141441A66C7E}"/>
               </a:ext>
             </a:extLst>
           </p:cNvPr>
@@ -4116,18 +4876,15 @@
         </p:nvSpPr>
         <p:spPr>
           <a:xfrm>
-            <a:off x="3186545" y="2318163"/>
-            <a:ext cx="415636" cy="405740"/>
-          </a:xfrm>
-          <a:prstGeom prst="ellipse">
+            <a:off x="6203208" y="2805545"/>
+            <a:ext cx="1702130" cy="623454"/>
+          </a:xfrm>
+          <a:prstGeom prst="roundRect">
             <a:avLst/>
           </a:prstGeom>
           <a:solidFill>
-            <a:srgbClr val="00B0F0"/>
+            <a:srgbClr val="D1D2E7"/>
           </a:solidFill>
-          <a:ln>
-            <a:noFill/>
-          </a:ln>
         </p:spPr>
         <p:style>
           <a:lnRef idx="2">
@@ -4156,10 +4913,10 @@
       </p:sp>
       <p:sp>
         <p:nvSpPr>
-          <p:cNvPr id="4" name="Oval 3">
-            <a:extLst>
-              <a:ext uri="{FF2B5EF4-FFF2-40B4-BE49-F238E27FC236}">
-                <a16:creationId xmlns:a16="http://schemas.microsoft.com/office/drawing/2014/main" id="{BB084896-6568-C04B-591B-65E18001EF94}"/>
+          <p:cNvPr id="4" name="Rounded Rectangle 3">
+            <a:extLst>
+              <a:ext uri="{FF2B5EF4-FFF2-40B4-BE49-F238E27FC236}">
+                <a16:creationId xmlns:a16="http://schemas.microsoft.com/office/drawing/2014/main" id="{38C74A10-5598-7F80-5809-524CC3845A4A}"/>
               </a:ext>
             </a:extLst>
           </p:cNvPr>
@@ -4168,18 +4925,15 @@
         </p:nvSpPr>
         <p:spPr>
           <a:xfrm>
-            <a:off x="3433946" y="1952007"/>
-            <a:ext cx="415636" cy="405740"/>
-          </a:xfrm>
-          <a:prstGeom prst="ellipse">
+            <a:off x="399143" y="2805544"/>
+            <a:ext cx="1702130" cy="623454"/>
+          </a:xfrm>
+          <a:prstGeom prst="roundRect">
             <a:avLst/>
           </a:prstGeom>
           <a:solidFill>
-            <a:srgbClr val="00B0F0"/>
+            <a:srgbClr val="23A9E1"/>
           </a:solidFill>
-          <a:ln>
-            <a:noFill/>
-          </a:ln>
         </p:spPr>
         <p:style>
           <a:lnRef idx="2">
@@ -4208,10 +4962,10 @@
       </p:sp>
       <p:sp>
         <p:nvSpPr>
-          <p:cNvPr id="5" name="Oval 4">
-            <a:extLst>
-              <a:ext uri="{FF2B5EF4-FFF2-40B4-BE49-F238E27FC236}">
-                <a16:creationId xmlns:a16="http://schemas.microsoft.com/office/drawing/2014/main" id="{8DED6612-2CB2-9232-4DFF-EA516F34A552}"/>
+          <p:cNvPr id="5" name="Rounded Rectangle 4">
+            <a:extLst>
+              <a:ext uri="{FF2B5EF4-FFF2-40B4-BE49-F238E27FC236}">
+                <a16:creationId xmlns:a16="http://schemas.microsoft.com/office/drawing/2014/main" id="{2BC9C30C-F426-DA72-BC38-B2BFF3BC077B}"/>
               </a:ext>
             </a:extLst>
           </p:cNvPr>
@@ -4220,18 +4974,15 @@
         </p:nvSpPr>
         <p:spPr>
           <a:xfrm>
-            <a:off x="3394363" y="2209305"/>
-            <a:ext cx="415636" cy="405740"/>
-          </a:xfrm>
-          <a:prstGeom prst="ellipse">
+            <a:off x="8944429" y="2805544"/>
+            <a:ext cx="1702130" cy="623454"/>
+          </a:xfrm>
+          <a:prstGeom prst="roundRect">
             <a:avLst/>
           </a:prstGeom>
           <a:solidFill>
-            <a:srgbClr val="F234B3"/>
+            <a:srgbClr val="8D97CA"/>
           </a:solidFill>
-          <a:ln>
-            <a:noFill/>
-          </a:ln>
         </p:spPr>
         <p:style>
           <a:lnRef idx="2">
@@ -4263,7 +5014,7 @@
           <p:cNvPr id="6" name="Picture 5">
             <a:extLst>
               <a:ext uri="{FF2B5EF4-FFF2-40B4-BE49-F238E27FC236}">
-                <a16:creationId xmlns:a16="http://schemas.microsoft.com/office/drawing/2014/main" id="{92AB0F26-EDAA-3946-465C-5B42D46EF21F}"/>
+                <a16:creationId xmlns:a16="http://schemas.microsoft.com/office/drawing/2014/main" id="{8D997F8C-026F-5B47-9737-1C8CF9CB003C}"/>
               </a:ext>
             </a:extLst>
           </p:cNvPr>
@@ -4280,8 +5031,8 @@
         </p:blipFill>
         <p:spPr>
           <a:xfrm>
-            <a:off x="4292435" y="1315708"/>
-            <a:ext cx="6477000" cy="4226585"/>
+            <a:off x="3655511" y="-3153696"/>
+            <a:ext cx="4148667" cy="4931833"/>
           </a:xfrm>
           <a:prstGeom prst="rect">
             <a:avLst/>
@@ -4293,7 +5044,7 @@
           <p:cNvPr id="7" name="Rounded Rectangle 6">
             <a:extLst>
               <a:ext uri="{FF2B5EF4-FFF2-40B4-BE49-F238E27FC236}">
-                <a16:creationId xmlns:a16="http://schemas.microsoft.com/office/drawing/2014/main" id="{2A7E5929-BD5F-0A48-605A-4CC41D55D85E}"/>
+                <a16:creationId xmlns:a16="http://schemas.microsoft.com/office/drawing/2014/main" id="{3399D38A-6858-1527-E456-B99D5D9318B8}"/>
               </a:ext>
             </a:extLst>
           </p:cNvPr>
@@ -4302,23 +5053,17 @@
         </p:nvSpPr>
         <p:spPr>
           <a:xfrm>
-            <a:off x="4539836" y="1877786"/>
-            <a:ext cx="1761507" cy="3463637"/>
+            <a:off x="4152241" y="4258623"/>
+            <a:ext cx="1702130" cy="623454"/>
           </a:xfrm>
           <a:prstGeom prst="roundRect">
-            <a:avLst>
-              <a:gd name="adj" fmla="val 4307"/>
-            </a:avLst>
+            <a:avLst/>
           </a:prstGeom>
           <a:solidFill>
-            <a:srgbClr val="156082">
-              <a:alpha val="62353"/>
-            </a:srgbClr>
+            <a:srgbClr val="D1D1D1"/>
           </a:solidFill>
           <a:ln>
-            <a:solidFill>
-              <a:schemeClr val="bg1"/>
-            </a:solidFill>
+            <a:noFill/>
           </a:ln>
         </p:spPr>
         <p:style>
@@ -4346,81 +5091,61 @@
           </a:p>
         </p:txBody>
       </p:sp>
-      <p:sp>
-        <p:nvSpPr>
-          <p:cNvPr id="9" name="TextBox 8">
-            <a:extLst>
-              <a:ext uri="{FF2B5EF4-FFF2-40B4-BE49-F238E27FC236}">
-                <a16:creationId xmlns:a16="http://schemas.microsoft.com/office/drawing/2014/main" id="{9C7F70A7-B101-0D95-D82A-B1E392E36E3D}"/>
-              </a:ext>
-            </a:extLst>
-          </p:cNvPr>
-          <p:cNvSpPr txBox="1"/>
+    </p:spTree>
+    <p:extLst>
+      <p:ext uri="{BB962C8B-B14F-4D97-AF65-F5344CB8AC3E}">
+        <p14:creationId xmlns:p14="http://schemas.microsoft.com/office/powerpoint/2010/main" val="3761357932"/>
+      </p:ext>
+    </p:extLst>
+  </p:cSld>
+  <p:clrMapOvr>
+    <a:masterClrMapping/>
+  </p:clrMapOvr>
+</p:sld>
+</file>
+
+<file path=ppt/slides/slide6.xml><?xml version="1.0" encoding="utf-8"?>
+<p:sld xmlns:a="http://schemas.openxmlformats.org/drawingml/2006/main" xmlns:r="http://schemas.openxmlformats.org/officeDocument/2006/relationships" xmlns:p="http://schemas.openxmlformats.org/presentationml/2006/main">
+  <p:cSld>
+    <p:spTree>
+      <p:nvGrpSpPr>
+        <p:cNvPr id="1" name=""/>
+        <p:cNvGrpSpPr/>
+        <p:nvPr/>
+      </p:nvGrpSpPr>
+      <p:grpSpPr>
+        <a:xfrm>
+          <a:off x="0" y="0"/>
+          <a:ext cx="0" cy="0"/>
+          <a:chOff x="0" y="0"/>
+          <a:chExt cx="0" cy="0"/>
+        </a:xfrm>
+      </p:grpSpPr>
+      <p:sp>
+        <p:nvSpPr>
+          <p:cNvPr id="2" name="Oval 1">
+            <a:extLst>
+              <a:ext uri="{FF2B5EF4-FFF2-40B4-BE49-F238E27FC236}">
+                <a16:creationId xmlns:a16="http://schemas.microsoft.com/office/drawing/2014/main" id="{99D07DEB-3C1B-2A10-A13A-90E5084B4DFC}"/>
+              </a:ext>
+            </a:extLst>
+          </p:cNvPr>
+          <p:cNvSpPr/>
           <p:nvPr/>
         </p:nvSpPr>
         <p:spPr>
           <a:xfrm>
-            <a:off x="4595594" y="2412176"/>
-            <a:ext cx="1059842" cy="323165"/>
-          </a:xfrm>
-          <a:prstGeom prst="rect">
+            <a:off x="2978728" y="2115293"/>
+            <a:ext cx="415636" cy="405740"/>
+          </a:xfrm>
+          <a:prstGeom prst="ellipse">
             <a:avLst/>
           </a:prstGeom>
-          <a:noFill/>
-        </p:spPr>
-        <p:txBody>
-          <a:bodyPr wrap="none" rtlCol="0">
-            <a:spAutoFit/>
-          </a:bodyPr>
-          <a:lstStyle/>
-          <a:p>
-            <a:r>
-              <a:rPr lang="en-US" sz="1500" dirty="0" err="1">
-                <a:solidFill>
-                  <a:srgbClr val="BFBFBF"/>
-                </a:solidFill>
-              </a:rPr>
-              <a:t>fasgaewga</a:t>
-            </a:r>
-            <a:endParaRPr lang="en-US" sz="1500" dirty="0">
-              <a:solidFill>
-                <a:srgbClr val="BFBFBF"/>
-              </a:solidFill>
-            </a:endParaRPr>
-          </a:p>
-        </p:txBody>
-      </p:sp>
-      <p:sp>
-        <p:nvSpPr>
-          <p:cNvPr id="10" name="Rounded Rectangle 9">
-            <a:extLst>
-              <a:ext uri="{FF2B5EF4-FFF2-40B4-BE49-F238E27FC236}">
-                <a16:creationId xmlns:a16="http://schemas.microsoft.com/office/drawing/2014/main" id="{51330382-3C83-4335-5216-01ABC9C85280}"/>
-              </a:ext>
-            </a:extLst>
-          </p:cNvPr>
-          <p:cNvSpPr/>
-          <p:nvPr/>
-        </p:nvSpPr>
-        <p:spPr>
-          <a:xfrm>
-            <a:off x="4539836" y="1420916"/>
-            <a:ext cx="1761507" cy="357909"/>
-          </a:xfrm>
-          <a:prstGeom prst="roundRect">
-            <a:avLst>
-              <a:gd name="adj" fmla="val 4307"/>
-            </a:avLst>
-          </a:prstGeom>
           <a:solidFill>
-            <a:srgbClr val="0070C0">
-              <a:alpha val="61961"/>
-            </a:srgbClr>
+            <a:srgbClr val="00B0F0"/>
           </a:solidFill>
           <a:ln>
-            <a:solidFill>
-              <a:schemeClr val="bg1"/>
-            </a:solidFill>
+            <a:noFill/>
           </a:ln>
         </p:spPr>
         <p:style>
@@ -4448,6 +5173,352 @@
           </a:p>
         </p:txBody>
       </p:sp>
+      <p:sp>
+        <p:nvSpPr>
+          <p:cNvPr id="3" name="Oval 2">
+            <a:extLst>
+              <a:ext uri="{FF2B5EF4-FFF2-40B4-BE49-F238E27FC236}">
+                <a16:creationId xmlns:a16="http://schemas.microsoft.com/office/drawing/2014/main" id="{D701B6F8-CD93-98F8-E64D-51072F6999A8}"/>
+              </a:ext>
+            </a:extLst>
+          </p:cNvPr>
+          <p:cNvSpPr/>
+          <p:nvPr/>
+        </p:nvSpPr>
+        <p:spPr>
+          <a:xfrm>
+            <a:off x="3186545" y="2318163"/>
+            <a:ext cx="415636" cy="405740"/>
+          </a:xfrm>
+          <a:prstGeom prst="ellipse">
+            <a:avLst/>
+          </a:prstGeom>
+          <a:solidFill>
+            <a:srgbClr val="00B0F0"/>
+          </a:solidFill>
+          <a:ln>
+            <a:noFill/>
+          </a:ln>
+        </p:spPr>
+        <p:style>
+          <a:lnRef idx="2">
+            <a:schemeClr val="accent1">
+              <a:shade val="15000"/>
+            </a:schemeClr>
+          </a:lnRef>
+          <a:fillRef idx="1">
+            <a:schemeClr val="accent1"/>
+          </a:fillRef>
+          <a:effectRef idx="0">
+            <a:schemeClr val="accent1"/>
+          </a:effectRef>
+          <a:fontRef idx="minor">
+            <a:schemeClr val="lt1"/>
+          </a:fontRef>
+        </p:style>
+        <p:txBody>
+          <a:bodyPr rtlCol="0" anchor="ctr"/>
+          <a:lstStyle/>
+          <a:p>
+            <a:pPr algn="ctr"/>
+            <a:endParaRPr lang="en-US" sz="1500"/>
+          </a:p>
+        </p:txBody>
+      </p:sp>
+      <p:sp>
+        <p:nvSpPr>
+          <p:cNvPr id="4" name="Oval 3">
+            <a:extLst>
+              <a:ext uri="{FF2B5EF4-FFF2-40B4-BE49-F238E27FC236}">
+                <a16:creationId xmlns:a16="http://schemas.microsoft.com/office/drawing/2014/main" id="{BB084896-6568-C04B-591B-65E18001EF94}"/>
+              </a:ext>
+            </a:extLst>
+          </p:cNvPr>
+          <p:cNvSpPr/>
+          <p:nvPr/>
+        </p:nvSpPr>
+        <p:spPr>
+          <a:xfrm>
+            <a:off x="3433946" y="1952007"/>
+            <a:ext cx="415636" cy="405740"/>
+          </a:xfrm>
+          <a:prstGeom prst="ellipse">
+            <a:avLst/>
+          </a:prstGeom>
+          <a:solidFill>
+            <a:srgbClr val="00B0F0"/>
+          </a:solidFill>
+          <a:ln>
+            <a:noFill/>
+          </a:ln>
+        </p:spPr>
+        <p:style>
+          <a:lnRef idx="2">
+            <a:schemeClr val="accent1">
+              <a:shade val="15000"/>
+            </a:schemeClr>
+          </a:lnRef>
+          <a:fillRef idx="1">
+            <a:schemeClr val="accent1"/>
+          </a:fillRef>
+          <a:effectRef idx="0">
+            <a:schemeClr val="accent1"/>
+          </a:effectRef>
+          <a:fontRef idx="minor">
+            <a:schemeClr val="lt1"/>
+          </a:fontRef>
+        </p:style>
+        <p:txBody>
+          <a:bodyPr rtlCol="0" anchor="ctr"/>
+          <a:lstStyle/>
+          <a:p>
+            <a:pPr algn="ctr"/>
+            <a:endParaRPr lang="en-US" sz="1500"/>
+          </a:p>
+        </p:txBody>
+      </p:sp>
+      <p:sp>
+        <p:nvSpPr>
+          <p:cNvPr id="5" name="Oval 4">
+            <a:extLst>
+              <a:ext uri="{FF2B5EF4-FFF2-40B4-BE49-F238E27FC236}">
+                <a16:creationId xmlns:a16="http://schemas.microsoft.com/office/drawing/2014/main" id="{8DED6612-2CB2-9232-4DFF-EA516F34A552}"/>
+              </a:ext>
+            </a:extLst>
+          </p:cNvPr>
+          <p:cNvSpPr/>
+          <p:nvPr/>
+        </p:nvSpPr>
+        <p:spPr>
+          <a:xfrm>
+            <a:off x="3394363" y="2209305"/>
+            <a:ext cx="415636" cy="405740"/>
+          </a:xfrm>
+          <a:prstGeom prst="ellipse">
+            <a:avLst/>
+          </a:prstGeom>
+          <a:solidFill>
+            <a:srgbClr val="F234B3"/>
+          </a:solidFill>
+          <a:ln>
+            <a:noFill/>
+          </a:ln>
+        </p:spPr>
+        <p:style>
+          <a:lnRef idx="2">
+            <a:schemeClr val="accent1">
+              <a:shade val="15000"/>
+            </a:schemeClr>
+          </a:lnRef>
+          <a:fillRef idx="1">
+            <a:schemeClr val="accent1"/>
+          </a:fillRef>
+          <a:effectRef idx="0">
+            <a:schemeClr val="accent1"/>
+          </a:effectRef>
+          <a:fontRef idx="minor">
+            <a:schemeClr val="lt1"/>
+          </a:fontRef>
+        </p:style>
+        <p:txBody>
+          <a:bodyPr rtlCol="0" anchor="ctr"/>
+          <a:lstStyle/>
+          <a:p>
+            <a:pPr algn="ctr"/>
+            <a:endParaRPr lang="en-US" sz="1500"/>
+          </a:p>
+        </p:txBody>
+      </p:sp>
+      <p:pic>
+        <p:nvPicPr>
+          <p:cNvPr id="6" name="Picture 5">
+            <a:extLst>
+              <a:ext uri="{FF2B5EF4-FFF2-40B4-BE49-F238E27FC236}">
+                <a16:creationId xmlns:a16="http://schemas.microsoft.com/office/drawing/2014/main" id="{92AB0F26-EDAA-3946-465C-5B42D46EF21F}"/>
+              </a:ext>
+            </a:extLst>
+          </p:cNvPr>
+          <p:cNvPicPr>
+            <a:picLocks noChangeAspect="1"/>
+          </p:cNvPicPr>
+          <p:nvPr/>
+        </p:nvPicPr>
+        <p:blipFill>
+          <a:blip r:embed="rId2"/>
+          <a:stretch>
+            <a:fillRect/>
+          </a:stretch>
+        </p:blipFill>
+        <p:spPr>
+          <a:xfrm>
+            <a:off x="4292435" y="1315708"/>
+            <a:ext cx="6477000" cy="4226585"/>
+          </a:xfrm>
+          <a:prstGeom prst="rect">
+            <a:avLst/>
+          </a:prstGeom>
+        </p:spPr>
+      </p:pic>
+      <p:sp>
+        <p:nvSpPr>
+          <p:cNvPr id="7" name="Rounded Rectangle 6">
+            <a:extLst>
+              <a:ext uri="{FF2B5EF4-FFF2-40B4-BE49-F238E27FC236}">
+                <a16:creationId xmlns:a16="http://schemas.microsoft.com/office/drawing/2014/main" id="{2A7E5929-BD5F-0A48-605A-4CC41D55D85E}"/>
+              </a:ext>
+            </a:extLst>
+          </p:cNvPr>
+          <p:cNvSpPr/>
+          <p:nvPr/>
+        </p:nvSpPr>
+        <p:spPr>
+          <a:xfrm>
+            <a:off x="4539836" y="1877786"/>
+            <a:ext cx="1761507" cy="3463637"/>
+          </a:xfrm>
+          <a:prstGeom prst="roundRect">
+            <a:avLst>
+              <a:gd name="adj" fmla="val 4307"/>
+            </a:avLst>
+          </a:prstGeom>
+          <a:solidFill>
+            <a:srgbClr val="156082">
+              <a:alpha val="62353"/>
+            </a:srgbClr>
+          </a:solidFill>
+          <a:ln>
+            <a:solidFill>
+              <a:schemeClr val="bg1"/>
+            </a:solidFill>
+          </a:ln>
+        </p:spPr>
+        <p:style>
+          <a:lnRef idx="2">
+            <a:schemeClr val="accent1">
+              <a:shade val="15000"/>
+            </a:schemeClr>
+          </a:lnRef>
+          <a:fillRef idx="1">
+            <a:schemeClr val="accent1"/>
+          </a:fillRef>
+          <a:effectRef idx="0">
+            <a:schemeClr val="accent1"/>
+          </a:effectRef>
+          <a:fontRef idx="minor">
+            <a:schemeClr val="lt1"/>
+          </a:fontRef>
+        </p:style>
+        <p:txBody>
+          <a:bodyPr rtlCol="0" anchor="ctr"/>
+          <a:lstStyle/>
+          <a:p>
+            <a:pPr algn="ctr"/>
+            <a:endParaRPr lang="en-US" sz="1500"/>
+          </a:p>
+        </p:txBody>
+      </p:sp>
+      <p:sp>
+        <p:nvSpPr>
+          <p:cNvPr id="9" name="TextBox 8">
+            <a:extLst>
+              <a:ext uri="{FF2B5EF4-FFF2-40B4-BE49-F238E27FC236}">
+                <a16:creationId xmlns:a16="http://schemas.microsoft.com/office/drawing/2014/main" id="{9C7F70A7-B101-0D95-D82A-B1E392E36E3D}"/>
+              </a:ext>
+            </a:extLst>
+          </p:cNvPr>
+          <p:cNvSpPr txBox="1"/>
+          <p:nvPr/>
+        </p:nvSpPr>
+        <p:spPr>
+          <a:xfrm>
+            <a:off x="4595594" y="2412176"/>
+            <a:ext cx="1059842" cy="323165"/>
+          </a:xfrm>
+          <a:prstGeom prst="rect">
+            <a:avLst/>
+          </a:prstGeom>
+          <a:noFill/>
+        </p:spPr>
+        <p:txBody>
+          <a:bodyPr wrap="none" rtlCol="0">
+            <a:spAutoFit/>
+          </a:bodyPr>
+          <a:lstStyle/>
+          <a:p>
+            <a:r>
+              <a:rPr lang="en-US" sz="1500" dirty="0" err="1">
+                <a:solidFill>
+                  <a:srgbClr val="BFBFBF"/>
+                </a:solidFill>
+              </a:rPr>
+              <a:t>fasgaewga</a:t>
+            </a:r>
+            <a:endParaRPr lang="en-US" sz="1500" dirty="0">
+              <a:solidFill>
+                <a:srgbClr val="BFBFBF"/>
+              </a:solidFill>
+            </a:endParaRPr>
+          </a:p>
+        </p:txBody>
+      </p:sp>
+      <p:sp>
+        <p:nvSpPr>
+          <p:cNvPr id="10" name="Rounded Rectangle 9">
+            <a:extLst>
+              <a:ext uri="{FF2B5EF4-FFF2-40B4-BE49-F238E27FC236}">
+                <a16:creationId xmlns:a16="http://schemas.microsoft.com/office/drawing/2014/main" id="{51330382-3C83-4335-5216-01ABC9C85280}"/>
+              </a:ext>
+            </a:extLst>
+          </p:cNvPr>
+          <p:cNvSpPr/>
+          <p:nvPr/>
+        </p:nvSpPr>
+        <p:spPr>
+          <a:xfrm>
+            <a:off x="4539836" y="1420916"/>
+            <a:ext cx="1761507" cy="357909"/>
+          </a:xfrm>
+          <a:prstGeom prst="roundRect">
+            <a:avLst>
+              <a:gd name="adj" fmla="val 4307"/>
+            </a:avLst>
+          </a:prstGeom>
+          <a:solidFill>
+            <a:srgbClr val="0070C0">
+              <a:alpha val="61961"/>
+            </a:srgbClr>
+          </a:solidFill>
+          <a:ln>
+            <a:solidFill>
+              <a:schemeClr val="bg1"/>
+            </a:solidFill>
+          </a:ln>
+        </p:spPr>
+        <p:style>
+          <a:lnRef idx="2">
+            <a:schemeClr val="accent1">
+              <a:shade val="15000"/>
+            </a:schemeClr>
+          </a:lnRef>
+          <a:fillRef idx="1">
+            <a:schemeClr val="accent1"/>
+          </a:fillRef>
+          <a:effectRef idx="0">
+            <a:schemeClr val="accent1"/>
+          </a:effectRef>
+          <a:fontRef idx="minor">
+            <a:schemeClr val="lt1"/>
+          </a:fontRef>
+        </p:style>
+        <p:txBody>
+          <a:bodyPr rtlCol="0" anchor="ctr"/>
+          <a:lstStyle/>
+          <a:p>
+            <a:pPr algn="ctr"/>
+            <a:endParaRPr lang="en-US" sz="1500"/>
+          </a:p>
+        </p:txBody>
+      </p:sp>
     </p:spTree>
     <p:extLst>
       <p:ext uri="{BB962C8B-B14F-4D97-AF65-F5344CB8AC3E}">
@@ -4461,7 +5532,7 @@
 </p:sld>
 </file>
 
-<file path=ppt/slides/slide6.xml><?xml version="1.0" encoding="utf-8"?>
+<file path=ppt/slides/slide7.xml><?xml version="1.0" encoding="utf-8"?>
 <p:sld xmlns:a="http://schemas.openxmlformats.org/drawingml/2006/main" xmlns:r="http://schemas.openxmlformats.org/officeDocument/2006/relationships" xmlns:p="http://schemas.openxmlformats.org/presentationml/2006/main">
   <p:cSld>
     <p:spTree>
